--- a/Curriculum/15_ナイアガラエフェクトの基礎.pptx
+++ b/Curriculum/15_ナイアガラエフェクトの基礎.pptx
@@ -10,21 +10,20 @@
     <p:sldId id="258" r:id="rId4"/>
     <p:sldId id="259" r:id="rId5"/>
     <p:sldId id="260" r:id="rId6"/>
-    <p:sldId id="263" r:id="rId7"/>
-    <p:sldId id="264" r:id="rId8"/>
-    <p:sldId id="265" r:id="rId9"/>
-    <p:sldId id="261" r:id="rId10"/>
-    <p:sldId id="262" r:id="rId11"/>
-    <p:sldId id="266" r:id="rId12"/>
-    <p:sldId id="267" r:id="rId13"/>
-    <p:sldId id="268" r:id="rId14"/>
-    <p:sldId id="269" r:id="rId15"/>
-    <p:sldId id="270" r:id="rId16"/>
-    <p:sldId id="271" r:id="rId17"/>
-    <p:sldId id="272" r:id="rId18"/>
-    <p:sldId id="273" r:id="rId19"/>
-    <p:sldId id="274" r:id="rId20"/>
-    <p:sldId id="275" r:id="rId21"/>
+    <p:sldId id="264" r:id="rId7"/>
+    <p:sldId id="265" r:id="rId8"/>
+    <p:sldId id="261" r:id="rId9"/>
+    <p:sldId id="262" r:id="rId10"/>
+    <p:sldId id="266" r:id="rId11"/>
+    <p:sldId id="267" r:id="rId12"/>
+    <p:sldId id="268" r:id="rId13"/>
+    <p:sldId id="269" r:id="rId14"/>
+    <p:sldId id="270" r:id="rId15"/>
+    <p:sldId id="271" r:id="rId16"/>
+    <p:sldId id="272" r:id="rId17"/>
+    <p:sldId id="273" r:id="rId18"/>
+    <p:sldId id="274" r:id="rId19"/>
+    <p:sldId id="275" r:id="rId20"/>
   </p:sldIdLst>
   <p:sldSz cx="12192000" cy="6858000"/>
   <p:notesSz cx="6858000" cy="9144000"/>
@@ -278,7 +277,7 @@
           <a:p>
             <a:fld id="{E9CC885B-4903-4D54-9A93-00025F12DED9}" type="datetimeFigureOut">
               <a:rPr kumimoji="1" lang="ja-JP" altLang="en-US" smtClean="0"/>
-              <a:t>2025/2/17</a:t>
+              <a:t>2025/8/7</a:t>
             </a:fld>
             <a:endParaRPr kumimoji="1" lang="ja-JP" altLang="en-US"/>
           </a:p>
@@ -508,7 +507,7 @@
           <a:p>
             <a:fld id="{E9CC885B-4903-4D54-9A93-00025F12DED9}" type="datetimeFigureOut">
               <a:rPr kumimoji="1" lang="ja-JP" altLang="en-US" smtClean="0"/>
-              <a:t>2025/2/17</a:t>
+              <a:t>2025/8/7</a:t>
             </a:fld>
             <a:endParaRPr kumimoji="1" lang="ja-JP" altLang="en-US"/>
           </a:p>
@@ -748,7 +747,7 @@
           <a:p>
             <a:fld id="{E9CC885B-4903-4D54-9A93-00025F12DED9}" type="datetimeFigureOut">
               <a:rPr kumimoji="1" lang="ja-JP" altLang="en-US" smtClean="0"/>
-              <a:t>2025/2/17</a:t>
+              <a:t>2025/8/7</a:t>
             </a:fld>
             <a:endParaRPr kumimoji="1" lang="ja-JP" altLang="en-US"/>
           </a:p>
@@ -978,7 +977,7 @@
           <a:p>
             <a:fld id="{E9CC885B-4903-4D54-9A93-00025F12DED9}" type="datetimeFigureOut">
               <a:rPr kumimoji="1" lang="ja-JP" altLang="en-US" smtClean="0"/>
-              <a:t>2025/2/17</a:t>
+              <a:t>2025/8/7</a:t>
             </a:fld>
             <a:endParaRPr kumimoji="1" lang="ja-JP" altLang="en-US"/>
           </a:p>
@@ -1253,7 +1252,7 @@
           <a:p>
             <a:fld id="{E9CC885B-4903-4D54-9A93-00025F12DED9}" type="datetimeFigureOut">
               <a:rPr kumimoji="1" lang="ja-JP" altLang="en-US" smtClean="0"/>
-              <a:t>2025/2/17</a:t>
+              <a:t>2025/8/7</a:t>
             </a:fld>
             <a:endParaRPr kumimoji="1" lang="ja-JP" altLang="en-US"/>
           </a:p>
@@ -1582,7 +1581,7 @@
           <a:p>
             <a:fld id="{E9CC885B-4903-4D54-9A93-00025F12DED9}" type="datetimeFigureOut">
               <a:rPr kumimoji="1" lang="ja-JP" altLang="en-US" smtClean="0"/>
-              <a:t>2025/2/17</a:t>
+              <a:t>2025/8/7</a:t>
             </a:fld>
             <a:endParaRPr kumimoji="1" lang="ja-JP" altLang="en-US"/>
           </a:p>
@@ -2058,7 +2057,7 @@
           <a:p>
             <a:fld id="{E9CC885B-4903-4D54-9A93-00025F12DED9}" type="datetimeFigureOut">
               <a:rPr kumimoji="1" lang="ja-JP" altLang="en-US" smtClean="0"/>
-              <a:t>2025/2/17</a:t>
+              <a:t>2025/8/7</a:t>
             </a:fld>
             <a:endParaRPr kumimoji="1" lang="ja-JP" altLang="en-US"/>
           </a:p>
@@ -2199,7 +2198,7 @@
           <a:p>
             <a:fld id="{E9CC885B-4903-4D54-9A93-00025F12DED9}" type="datetimeFigureOut">
               <a:rPr kumimoji="1" lang="ja-JP" altLang="en-US" smtClean="0"/>
-              <a:t>2025/2/17</a:t>
+              <a:t>2025/8/7</a:t>
             </a:fld>
             <a:endParaRPr kumimoji="1" lang="ja-JP" altLang="en-US"/>
           </a:p>
@@ -2312,7 +2311,7 @@
           <a:p>
             <a:fld id="{E9CC885B-4903-4D54-9A93-00025F12DED9}" type="datetimeFigureOut">
               <a:rPr kumimoji="1" lang="ja-JP" altLang="en-US" smtClean="0"/>
-              <a:t>2025/2/17</a:t>
+              <a:t>2025/8/7</a:t>
             </a:fld>
             <a:endParaRPr kumimoji="1" lang="ja-JP" altLang="en-US"/>
           </a:p>
@@ -2655,7 +2654,7 @@
           <a:p>
             <a:fld id="{E9CC885B-4903-4D54-9A93-00025F12DED9}" type="datetimeFigureOut">
               <a:rPr kumimoji="1" lang="ja-JP" altLang="en-US" smtClean="0"/>
-              <a:t>2025/2/17</a:t>
+              <a:t>2025/8/7</a:t>
             </a:fld>
             <a:endParaRPr kumimoji="1" lang="ja-JP" altLang="en-US"/>
           </a:p>
@@ -2943,7 +2942,7 @@
           <a:p>
             <a:fld id="{E9CC885B-4903-4D54-9A93-00025F12DED9}" type="datetimeFigureOut">
               <a:rPr kumimoji="1" lang="ja-JP" altLang="en-US" smtClean="0"/>
-              <a:t>2025/2/17</a:t>
+              <a:t>2025/8/7</a:t>
             </a:fld>
             <a:endParaRPr kumimoji="1" lang="ja-JP" altLang="en-US"/>
           </a:p>
@@ -3216,7 +3215,7 @@
           <a:p>
             <a:fld id="{E9CC885B-4903-4D54-9A93-00025F12DED9}" type="datetimeFigureOut">
               <a:rPr kumimoji="1" lang="ja-JP" altLang="en-US" smtClean="0"/>
-              <a:t>2025/2/17</a:t>
+              <a:t>2025/8/7</a:t>
             </a:fld>
             <a:endParaRPr kumimoji="1" lang="ja-JP" altLang="en-US"/>
           </a:p>
@@ -3837,7 +3836,7 @@
         <p:spPr>
           <a:xfrm>
             <a:off x="567542" y="1216429"/>
-            <a:ext cx="8404865" cy="830997"/>
+            <a:ext cx="9759403" cy="830997"/>
           </a:xfrm>
           <a:prstGeom prst="rect">
             <a:avLst/>
@@ -3853,6 +3852,18 @@
             <a:r>
               <a:rPr kumimoji="1" lang="ja-JP" altLang="en-US" sz="2400" dirty="0"/>
               <a:t>「</a:t>
+            </a:r>
+            <a:r>
+              <a:rPr kumimoji="1" lang="ja-JP" altLang="en-US" sz="2400" b="1" dirty="0">
+                <a:solidFill>
+                  <a:srgbClr val="FF0000"/>
+                </a:solidFill>
+              </a:rPr>
+              <a:t>パーティクルのスポーン</a:t>
+            </a:r>
+            <a:r>
+              <a:rPr kumimoji="1" lang="ja-JP" altLang="en-US" sz="2400" dirty="0"/>
+              <a:t>」に「</a:t>
             </a:r>
             <a:r>
               <a:rPr kumimoji="1" lang="en-US" altLang="ja-JP" sz="2400" b="1" dirty="0">
@@ -3860,29 +3871,57 @@
                   <a:srgbClr val="FF0000"/>
                 </a:solidFill>
               </a:rPr>
-              <a:t>Shape Primitive</a:t>
+              <a:t>Add Velocity</a:t>
             </a:r>
             <a:r>
               <a:rPr kumimoji="1" lang="ja-JP" altLang="en-US" sz="2400" dirty="0"/>
-              <a:t>」から発生位置の形状を選択できます。</a:t>
+              <a:t>」を追加しましょう。</a:t>
             </a:r>
             <a:endParaRPr kumimoji="1" lang="en-US" altLang="ja-JP" sz="2400" dirty="0"/>
           </a:p>
           <a:p>
             <a:r>
               <a:rPr lang="ja-JP" altLang="en-US" sz="2400" dirty="0"/>
-              <a:t>色々切り替えて確認してみましょう。</a:t>
-            </a:r>
-            <a:endParaRPr kumimoji="1" lang="en-US" altLang="ja-JP" sz="2400" dirty="0"/>
+              <a:t>これで</a:t>
+            </a:r>
+            <a:r>
+              <a:rPr lang="ja-JP" altLang="en-US" sz="2400" b="1" dirty="0">
+                <a:solidFill>
+                  <a:srgbClr val="FF0000"/>
+                </a:solidFill>
+              </a:rPr>
+              <a:t>粒子に</a:t>
+            </a:r>
+            <a:r>
+              <a:rPr lang="en-US" altLang="ja-JP" sz="2400" b="1" dirty="0">
+                <a:solidFill>
+                  <a:srgbClr val="FF0000"/>
+                </a:solidFill>
+              </a:rPr>
+              <a:t>Velocity</a:t>
+            </a:r>
+            <a:r>
+              <a:rPr lang="ja-JP" altLang="en-US" sz="2400" b="1" dirty="0">
+                <a:solidFill>
+                  <a:srgbClr val="FF0000"/>
+                </a:solidFill>
+              </a:rPr>
+              <a:t>（移動ベクトル）を与えられます。</a:t>
+            </a:r>
+            <a:endParaRPr kumimoji="1" lang="en-US" altLang="ja-JP" sz="2400" b="1" dirty="0">
+              <a:solidFill>
+                <a:srgbClr val="FF0000"/>
+              </a:solidFill>
+            </a:endParaRPr>
           </a:p>
         </p:txBody>
       </p:sp>
       <p:pic>
         <p:nvPicPr>
-          <p:cNvPr id="5" name="図 4">
-            <a:extLst>
-              <a:ext uri="{FF2B5EF4-FFF2-40B4-BE49-F238E27FC236}">
-                <a16:creationId xmlns:a16="http://schemas.microsoft.com/office/drawing/2014/main" id="{9FCA370F-832C-467A-BB37-06698A07C38B}"/>
+          <p:cNvPr id="3" name="図 2">
+            <a:extLst>
+              <a:ext uri="{FF2B5EF4-FFF2-40B4-BE49-F238E27FC236}">
+                <a16:creationId xmlns:a16="http://schemas.microsoft.com/office/drawing/2014/main" id="{017AAF50-21CD-47EF-A1C0-93C88EEAB151}"/>
               </a:ext>
             </a:extLst>
           </p:cNvPr>
@@ -3900,71 +3939,17 @@
         <p:spPr>
           <a:xfrm>
             <a:off x="567542" y="2187126"/>
-            <a:ext cx="6056196" cy="3792333"/>
+            <a:ext cx="8394738" cy="2985509"/>
           </a:xfrm>
           <a:prstGeom prst="rect">
             <a:avLst/>
           </a:prstGeom>
         </p:spPr>
       </p:pic>
-      <p:sp>
-        <p:nvSpPr>
-          <p:cNvPr id="7" name="矢印: 右 6">
-            <a:extLst>
-              <a:ext uri="{FF2B5EF4-FFF2-40B4-BE49-F238E27FC236}">
-                <a16:creationId xmlns:a16="http://schemas.microsoft.com/office/drawing/2014/main" id="{276F7436-8293-46BC-91CA-A56351A0E615}"/>
-              </a:ext>
-            </a:extLst>
-          </p:cNvPr>
-          <p:cNvSpPr/>
-          <p:nvPr/>
-        </p:nvSpPr>
-        <p:spPr>
-          <a:xfrm rot="13377481">
-            <a:off x="3032381" y="5316071"/>
-            <a:ext cx="519953" cy="331694"/>
-          </a:xfrm>
-          <a:prstGeom prst="rightArrow">
-            <a:avLst/>
-          </a:prstGeom>
-          <a:solidFill>
-            <a:srgbClr val="FF0000"/>
-          </a:solidFill>
-          <a:ln>
-            <a:solidFill>
-              <a:schemeClr val="tx1"/>
-            </a:solidFill>
-          </a:ln>
-        </p:spPr>
-        <p:style>
-          <a:lnRef idx="2">
-            <a:schemeClr val="accent1">
-              <a:shade val="50000"/>
-            </a:schemeClr>
-          </a:lnRef>
-          <a:fillRef idx="1">
-            <a:schemeClr val="accent1"/>
-          </a:fillRef>
-          <a:effectRef idx="0">
-            <a:schemeClr val="accent1"/>
-          </a:effectRef>
-          <a:fontRef idx="minor">
-            <a:schemeClr val="lt1"/>
-          </a:fontRef>
-        </p:style>
-        <p:txBody>
-          <a:bodyPr rtlCol="0" anchor="ctr"/>
-          <a:lstStyle/>
-          <a:p>
-            <a:pPr algn="ctr"/>
-            <a:endParaRPr kumimoji="1" lang="ja-JP" altLang="en-US"/>
-          </a:p>
-        </p:txBody>
-      </p:sp>
     </p:spTree>
     <p:extLst>
       <p:ext uri="{BB962C8B-B14F-4D97-AF65-F5344CB8AC3E}">
-        <p14:creationId xmlns:p14="http://schemas.microsoft.com/office/powerpoint/2010/main" val="4098460505"/>
+        <p14:creationId xmlns:p14="http://schemas.microsoft.com/office/powerpoint/2010/main" val="3925962752"/>
       </p:ext>
     </p:extLst>
   </p:cSld>
@@ -4041,7 +4026,7 @@
         <p:spPr>
           <a:xfrm>
             <a:off x="567542" y="1216429"/>
-            <a:ext cx="9759403" cy="830997"/>
+            <a:ext cx="8784777" cy="830997"/>
           </a:xfrm>
           <a:prstGeom prst="rect">
             <a:avLst/>
@@ -4057,18 +4042,6 @@
             <a:r>
               <a:rPr kumimoji="1" lang="ja-JP" altLang="en-US" sz="2400" dirty="0"/>
               <a:t>「</a:t>
-            </a:r>
-            <a:r>
-              <a:rPr kumimoji="1" lang="ja-JP" altLang="en-US" sz="2400" b="1" dirty="0">
-                <a:solidFill>
-                  <a:srgbClr val="FF0000"/>
-                </a:solidFill>
-              </a:rPr>
-              <a:t>パーティクルのスポーン</a:t>
-            </a:r>
-            <a:r>
-              <a:rPr kumimoji="1" lang="ja-JP" altLang="en-US" sz="2400" dirty="0"/>
-              <a:t>」に「</a:t>
             </a:r>
             <a:r>
               <a:rPr kumimoji="1" lang="en-US" altLang="ja-JP" sz="2400" b="1" dirty="0">
@@ -4076,57 +4049,29 @@
                   <a:srgbClr val="FF0000"/>
                 </a:solidFill>
               </a:rPr>
-              <a:t>Add Velocity</a:t>
+              <a:t>Velocity Mode</a:t>
             </a:r>
             <a:r>
               <a:rPr kumimoji="1" lang="ja-JP" altLang="en-US" sz="2400" dirty="0"/>
-              <a:t>」を追加しましょう。</a:t>
+              <a:t>」から移動ベクトルの種類が設定できます。</a:t>
             </a:r>
             <a:endParaRPr kumimoji="1" lang="en-US" altLang="ja-JP" sz="2400" dirty="0"/>
           </a:p>
           <a:p>
             <a:r>
-              <a:rPr lang="ja-JP" altLang="en-US" sz="2400" dirty="0"/>
-              <a:t>これで</a:t>
-            </a:r>
-            <a:r>
-              <a:rPr lang="ja-JP" altLang="en-US" sz="2400" b="1" dirty="0">
-                <a:solidFill>
-                  <a:srgbClr val="FF0000"/>
-                </a:solidFill>
-              </a:rPr>
-              <a:t>粒子に</a:t>
-            </a:r>
-            <a:r>
-              <a:rPr lang="en-US" altLang="ja-JP" sz="2400" b="1" dirty="0">
-                <a:solidFill>
-                  <a:srgbClr val="FF0000"/>
-                </a:solidFill>
-              </a:rPr>
-              <a:t>Velocity</a:t>
-            </a:r>
-            <a:r>
-              <a:rPr lang="ja-JP" altLang="en-US" sz="2400" b="1" dirty="0">
-                <a:solidFill>
-                  <a:srgbClr val="FF0000"/>
-                </a:solidFill>
-              </a:rPr>
-              <a:t>（移動ベクトル）を与えられます。</a:t>
-            </a:r>
-            <a:endParaRPr kumimoji="1" lang="en-US" altLang="ja-JP" sz="2400" b="1" dirty="0">
-              <a:solidFill>
-                <a:srgbClr val="FF0000"/>
-              </a:solidFill>
-            </a:endParaRPr>
+              <a:rPr kumimoji="1" lang="ja-JP" altLang="en-US" sz="2400" dirty="0"/>
+              <a:t>切り替えて確認してみましょう。</a:t>
+            </a:r>
+            <a:endParaRPr kumimoji="1" lang="en-US" altLang="ja-JP" sz="2400" dirty="0"/>
           </a:p>
         </p:txBody>
       </p:sp>
       <p:pic>
         <p:nvPicPr>
-          <p:cNvPr id="3" name="図 2">
-            <a:extLst>
-              <a:ext uri="{FF2B5EF4-FFF2-40B4-BE49-F238E27FC236}">
-                <a16:creationId xmlns:a16="http://schemas.microsoft.com/office/drawing/2014/main" id="{017AAF50-21CD-47EF-A1C0-93C88EEAB151}"/>
+          <p:cNvPr id="8" name="図 7">
+            <a:extLst>
+              <a:ext uri="{FF2B5EF4-FFF2-40B4-BE49-F238E27FC236}">
+                <a16:creationId xmlns:a16="http://schemas.microsoft.com/office/drawing/2014/main" id="{636C01EC-E6FE-48D4-A64D-A4DB705ED414}"/>
               </a:ext>
             </a:extLst>
           </p:cNvPr>
@@ -4144,7 +4089,7 @@
         <p:spPr>
           <a:xfrm>
             <a:off x="567542" y="2187126"/>
-            <a:ext cx="8394738" cy="2985509"/>
+            <a:ext cx="6246061" cy="3335133"/>
           </a:xfrm>
           <a:prstGeom prst="rect">
             <a:avLst/>
@@ -4154,7 +4099,7 @@
     </p:spTree>
     <p:extLst>
       <p:ext uri="{BB962C8B-B14F-4D97-AF65-F5344CB8AC3E}">
-        <p14:creationId xmlns:p14="http://schemas.microsoft.com/office/powerpoint/2010/main" val="3925962752"/>
+        <p14:creationId xmlns:p14="http://schemas.microsoft.com/office/powerpoint/2010/main" val="1417280768"/>
       </p:ext>
     </p:extLst>
   </p:cSld>
@@ -4231,7 +4176,7 @@
         <p:spPr>
           <a:xfrm>
             <a:off x="567542" y="1216429"/>
-            <a:ext cx="8784777" cy="830997"/>
+            <a:ext cx="8012130" cy="830997"/>
           </a:xfrm>
           <a:prstGeom prst="rect">
             <a:avLst/>
@@ -4247,6 +4192,18 @@
             <a:r>
               <a:rPr kumimoji="1" lang="ja-JP" altLang="en-US" sz="2400" dirty="0"/>
               <a:t>「</a:t>
+            </a:r>
+            <a:r>
+              <a:rPr kumimoji="1" lang="ja-JP" altLang="en-US" sz="2400" b="1" dirty="0">
+                <a:solidFill>
+                  <a:srgbClr val="FF0000"/>
+                </a:solidFill>
+              </a:rPr>
+              <a:t>パーティクルのスポーン</a:t>
+            </a:r>
+            <a:r>
+              <a:rPr kumimoji="1" lang="ja-JP" altLang="en-US" sz="2400" dirty="0"/>
+              <a:t>」に「</a:t>
             </a:r>
             <a:r>
               <a:rPr kumimoji="1" lang="en-US" altLang="ja-JP" sz="2400" b="1" dirty="0">
@@ -4254,18 +4211,18 @@
                   <a:srgbClr val="FF0000"/>
                 </a:solidFill>
               </a:rPr>
-              <a:t>Velocity Mode</a:t>
+              <a:t>Color</a:t>
             </a:r>
             <a:r>
               <a:rPr kumimoji="1" lang="ja-JP" altLang="en-US" sz="2400" dirty="0"/>
-              <a:t>」から移動ベクトルの種類が設定できます。</a:t>
+              <a:t>」を追加すると、</a:t>
             </a:r>
             <a:endParaRPr kumimoji="1" lang="en-US" altLang="ja-JP" sz="2400" dirty="0"/>
           </a:p>
           <a:p>
             <a:r>
-              <a:rPr kumimoji="1" lang="ja-JP" altLang="en-US" sz="2400" dirty="0"/>
-              <a:t>切り替えて確認してみましょう。</a:t>
+              <a:rPr lang="ja-JP" altLang="en-US" sz="2400" dirty="0"/>
+              <a:t>粒子の色を設定できます。</a:t>
             </a:r>
             <a:endParaRPr kumimoji="1" lang="en-US" altLang="ja-JP" sz="2400" dirty="0"/>
           </a:p>
@@ -4273,10 +4230,10 @@
       </p:sp>
       <p:pic>
         <p:nvPicPr>
-          <p:cNvPr id="8" name="図 7">
-            <a:extLst>
-              <a:ext uri="{FF2B5EF4-FFF2-40B4-BE49-F238E27FC236}">
-                <a16:creationId xmlns:a16="http://schemas.microsoft.com/office/drawing/2014/main" id="{636C01EC-E6FE-48D4-A64D-A4DB705ED414}"/>
+          <p:cNvPr id="3" name="図 2">
+            <a:extLst>
+              <a:ext uri="{FF2B5EF4-FFF2-40B4-BE49-F238E27FC236}">
+                <a16:creationId xmlns:a16="http://schemas.microsoft.com/office/drawing/2014/main" id="{A240788D-6FAE-4D28-91E4-773490BF2570}"/>
               </a:ext>
             </a:extLst>
           </p:cNvPr>
@@ -4294,17 +4251,100 @@
         <p:spPr>
           <a:xfrm>
             <a:off x="567542" y="2187126"/>
-            <a:ext cx="6246061" cy="3335133"/>
+            <a:ext cx="6229170" cy="2528310"/>
           </a:xfrm>
           <a:prstGeom prst="rect">
             <a:avLst/>
           </a:prstGeom>
         </p:spPr>
       </p:pic>
+      <p:pic>
+        <p:nvPicPr>
+          <p:cNvPr id="7" name="図 6">
+            <a:extLst>
+              <a:ext uri="{FF2B5EF4-FFF2-40B4-BE49-F238E27FC236}">
+                <a16:creationId xmlns:a16="http://schemas.microsoft.com/office/drawing/2014/main" id="{262D3972-46CE-4918-964D-9A57C3E5918C}"/>
+              </a:ext>
+            </a:extLst>
+          </p:cNvPr>
+          <p:cNvPicPr>
+            <a:picLocks noChangeAspect="1"/>
+          </p:cNvPicPr>
+          <p:nvPr/>
+        </p:nvPicPr>
+        <p:blipFill>
+          <a:blip r:embed="rId3"/>
+          <a:stretch>
+            <a:fillRect/>
+          </a:stretch>
+        </p:blipFill>
+        <p:spPr>
+          <a:xfrm>
+            <a:off x="567542" y="4855136"/>
+            <a:ext cx="4010585" cy="1800476"/>
+          </a:xfrm>
+          <a:prstGeom prst="rect">
+            <a:avLst/>
+          </a:prstGeom>
+        </p:spPr>
+      </p:pic>
+      <p:sp>
+        <p:nvSpPr>
+          <p:cNvPr id="9" name="テキスト ボックス 8">
+            <a:extLst>
+              <a:ext uri="{FF2B5EF4-FFF2-40B4-BE49-F238E27FC236}">
+                <a16:creationId xmlns:a16="http://schemas.microsoft.com/office/drawing/2014/main" id="{BCEA9D3A-E650-453D-913E-A94BB641FBAC}"/>
+              </a:ext>
+            </a:extLst>
+          </p:cNvPr>
+          <p:cNvSpPr txBox="1"/>
+          <p:nvPr/>
+        </p:nvSpPr>
+        <p:spPr>
+          <a:xfrm>
+            <a:off x="4976484" y="5455283"/>
+            <a:ext cx="6647974" cy="1200329"/>
+          </a:xfrm>
+          <a:prstGeom prst="rect">
+            <a:avLst/>
+          </a:prstGeom>
+          <a:noFill/>
+        </p:spPr>
+        <p:txBody>
+          <a:bodyPr wrap="none" rtlCol="0">
+            <a:spAutoFit/>
+          </a:bodyPr>
+          <a:lstStyle/>
+          <a:p>
+            <a:r>
+              <a:rPr kumimoji="1" lang="en-US" altLang="ja-JP" sz="2400" b="1" dirty="0">
+                <a:solidFill>
+                  <a:srgbClr val="00B050"/>
+                </a:solidFill>
+              </a:rPr>
+              <a:t>MEMO</a:t>
+            </a:r>
+          </a:p>
+          <a:p>
+            <a:r>
+              <a:rPr lang="ja-JP" altLang="en-US" sz="2400" dirty="0"/>
+              <a:t>これらのように「パーティクルのスポーン」は</a:t>
+            </a:r>
+            <a:endParaRPr lang="en-US" altLang="ja-JP" sz="2400" dirty="0"/>
+          </a:p>
+          <a:p>
+            <a:r>
+              <a:rPr kumimoji="1" lang="ja-JP" altLang="en-US" sz="2400" dirty="0"/>
+              <a:t>粒子発生時の設定を行います。</a:t>
+            </a:r>
+            <a:endParaRPr kumimoji="1" lang="en-US" altLang="ja-JP" sz="2400" dirty="0"/>
+          </a:p>
+        </p:txBody>
+      </p:sp>
     </p:spTree>
     <p:extLst>
       <p:ext uri="{BB962C8B-B14F-4D97-AF65-F5344CB8AC3E}">
-        <p14:creationId xmlns:p14="http://schemas.microsoft.com/office/powerpoint/2010/main" val="1417280768"/>
+        <p14:creationId xmlns:p14="http://schemas.microsoft.com/office/powerpoint/2010/main" val="1785463040"/>
       </p:ext>
     </p:extLst>
   </p:cSld>
@@ -4381,7 +4421,7 @@
         <p:spPr>
           <a:xfrm>
             <a:off x="567542" y="1216429"/>
-            <a:ext cx="8012130" cy="830997"/>
+            <a:ext cx="8653331" cy="830997"/>
           </a:xfrm>
           <a:prstGeom prst="rect">
             <a:avLst/>
@@ -4404,7 +4444,7 @@
                   <a:srgbClr val="FF0000"/>
                 </a:solidFill>
               </a:rPr>
-              <a:t>パーティクルのスポーン</a:t>
+              <a:t>パーティクルの更新</a:t>
             </a:r>
             <a:r>
               <a:rPr kumimoji="1" lang="ja-JP" altLang="en-US" sz="2400" dirty="0"/>
@@ -4416,7 +4456,7 @@
                   <a:srgbClr val="FF0000"/>
                 </a:solidFill>
               </a:rPr>
-              <a:t>Color</a:t>
+              <a:t>Gravity Force</a:t>
             </a:r>
             <a:r>
               <a:rPr kumimoji="1" lang="ja-JP" altLang="en-US" sz="2400" dirty="0"/>
@@ -4427,7 +4467,7 @@
           <a:p>
             <a:r>
               <a:rPr lang="ja-JP" altLang="en-US" sz="2400" dirty="0"/>
-              <a:t>粒子の色を設定できます。</a:t>
+              <a:t>粒子に重力がかかります。</a:t>
             </a:r>
             <a:endParaRPr kumimoji="1" lang="en-US" altLang="ja-JP" sz="2400" dirty="0"/>
           </a:p>
@@ -4435,10 +4475,10 @@
       </p:sp>
       <p:pic>
         <p:nvPicPr>
-          <p:cNvPr id="3" name="図 2">
-            <a:extLst>
-              <a:ext uri="{FF2B5EF4-FFF2-40B4-BE49-F238E27FC236}">
-                <a16:creationId xmlns:a16="http://schemas.microsoft.com/office/drawing/2014/main" id="{A240788D-6FAE-4D28-91E4-773490BF2570}"/>
+          <p:cNvPr id="5" name="図 4">
+            <a:extLst>
+              <a:ext uri="{FF2B5EF4-FFF2-40B4-BE49-F238E27FC236}">
+                <a16:creationId xmlns:a16="http://schemas.microsoft.com/office/drawing/2014/main" id="{8C740B9E-6CF0-41ED-81CD-DC97B5393C62}"/>
               </a:ext>
             </a:extLst>
           </p:cNvPr>
@@ -4455,101 +4495,18 @@
         </p:blipFill>
         <p:spPr>
           <a:xfrm>
-            <a:off x="567542" y="2187126"/>
-            <a:ext cx="6229170" cy="2528310"/>
+            <a:off x="567542" y="2187127"/>
+            <a:ext cx="6017241" cy="4294356"/>
           </a:xfrm>
           <a:prstGeom prst="rect">
             <a:avLst/>
           </a:prstGeom>
         </p:spPr>
       </p:pic>
-      <p:pic>
-        <p:nvPicPr>
-          <p:cNvPr id="7" name="図 6">
-            <a:extLst>
-              <a:ext uri="{FF2B5EF4-FFF2-40B4-BE49-F238E27FC236}">
-                <a16:creationId xmlns:a16="http://schemas.microsoft.com/office/drawing/2014/main" id="{262D3972-46CE-4918-964D-9A57C3E5918C}"/>
-              </a:ext>
-            </a:extLst>
-          </p:cNvPr>
-          <p:cNvPicPr>
-            <a:picLocks noChangeAspect="1"/>
-          </p:cNvPicPr>
-          <p:nvPr/>
-        </p:nvPicPr>
-        <p:blipFill>
-          <a:blip r:embed="rId3"/>
-          <a:stretch>
-            <a:fillRect/>
-          </a:stretch>
-        </p:blipFill>
-        <p:spPr>
-          <a:xfrm>
-            <a:off x="567542" y="4855136"/>
-            <a:ext cx="4010585" cy="1800476"/>
-          </a:xfrm>
-          <a:prstGeom prst="rect">
-            <a:avLst/>
-          </a:prstGeom>
-        </p:spPr>
-      </p:pic>
-      <p:sp>
-        <p:nvSpPr>
-          <p:cNvPr id="9" name="テキスト ボックス 8">
-            <a:extLst>
-              <a:ext uri="{FF2B5EF4-FFF2-40B4-BE49-F238E27FC236}">
-                <a16:creationId xmlns:a16="http://schemas.microsoft.com/office/drawing/2014/main" id="{BCEA9D3A-E650-453D-913E-A94BB641FBAC}"/>
-              </a:ext>
-            </a:extLst>
-          </p:cNvPr>
-          <p:cNvSpPr txBox="1"/>
-          <p:nvPr/>
-        </p:nvSpPr>
-        <p:spPr>
-          <a:xfrm>
-            <a:off x="4976484" y="5455283"/>
-            <a:ext cx="6647974" cy="1200329"/>
-          </a:xfrm>
-          <a:prstGeom prst="rect">
-            <a:avLst/>
-          </a:prstGeom>
-          <a:noFill/>
-        </p:spPr>
-        <p:txBody>
-          <a:bodyPr wrap="none" rtlCol="0">
-            <a:spAutoFit/>
-          </a:bodyPr>
-          <a:lstStyle/>
-          <a:p>
-            <a:r>
-              <a:rPr kumimoji="1" lang="en-US" altLang="ja-JP" sz="2400" b="1" dirty="0">
-                <a:solidFill>
-                  <a:srgbClr val="00B050"/>
-                </a:solidFill>
-              </a:rPr>
-              <a:t>MEMO</a:t>
-            </a:r>
-          </a:p>
-          <a:p>
-            <a:r>
-              <a:rPr lang="ja-JP" altLang="en-US" sz="2400" dirty="0"/>
-              <a:t>これらのように「パーティクルのスポーン」は</a:t>
-            </a:r>
-            <a:endParaRPr lang="en-US" altLang="ja-JP" sz="2400" dirty="0"/>
-          </a:p>
-          <a:p>
-            <a:r>
-              <a:rPr kumimoji="1" lang="ja-JP" altLang="en-US" sz="2400" dirty="0"/>
-              <a:t>粒子発生時の設定を行います。</a:t>
-            </a:r>
-            <a:endParaRPr kumimoji="1" lang="en-US" altLang="ja-JP" sz="2400" dirty="0"/>
-          </a:p>
-        </p:txBody>
-      </p:sp>
     </p:spTree>
     <p:extLst>
       <p:ext uri="{BB962C8B-B14F-4D97-AF65-F5344CB8AC3E}">
-        <p14:creationId xmlns:p14="http://schemas.microsoft.com/office/powerpoint/2010/main" val="1785463040"/>
+        <p14:creationId xmlns:p14="http://schemas.microsoft.com/office/powerpoint/2010/main" val="1125978900"/>
       </p:ext>
     </p:extLst>
   </p:cSld>
@@ -4626,7 +4583,7 @@
         <p:spPr>
           <a:xfrm>
             <a:off x="567542" y="1216429"/>
-            <a:ext cx="8653331" cy="830997"/>
+            <a:ext cx="8186857" cy="4524315"/>
           </a:xfrm>
           <a:prstGeom prst="rect">
             <a:avLst/>
@@ -4640,8 +4597,88 @@
           <a:lstStyle/>
           <a:p>
             <a:r>
+              <a:rPr lang="ja-JP" altLang="en-US" sz="2400" dirty="0"/>
+              <a:t>以下を調整するとエフェクトの再生時間を調整できます。</a:t>
+            </a:r>
+            <a:endParaRPr lang="en-US" altLang="ja-JP" sz="2400" dirty="0"/>
+          </a:p>
+          <a:p>
+            <a:r>
+              <a:rPr lang="ja-JP" altLang="en-US" sz="2400" dirty="0"/>
+              <a:t>色々調節していい感じのエフェクトを作りましょう。</a:t>
+            </a:r>
+            <a:endParaRPr lang="en-US" altLang="ja-JP" sz="2400" dirty="0"/>
+          </a:p>
+          <a:p>
+            <a:endParaRPr lang="en-US" altLang="ja-JP" sz="2400" dirty="0"/>
+          </a:p>
+          <a:p>
+            <a:r>
               <a:rPr kumimoji="1" lang="ja-JP" altLang="en-US" sz="2400" dirty="0"/>
-              <a:t>「</a:t>
+              <a:t>■エミッタの更新</a:t>
+            </a:r>
+            <a:endParaRPr kumimoji="1" lang="en-US" altLang="ja-JP" sz="2400" dirty="0"/>
+          </a:p>
+          <a:p>
+            <a:r>
+              <a:rPr kumimoji="1" lang="ja-JP" altLang="en-US" sz="2400" dirty="0"/>
+              <a:t>・</a:t>
+            </a:r>
+            <a:r>
+              <a:rPr kumimoji="1" lang="en-US" altLang="ja-JP" sz="2400" dirty="0"/>
+              <a:t>Emitter State &gt; Loop Duration</a:t>
+            </a:r>
+          </a:p>
+          <a:p>
+            <a:r>
+              <a:rPr lang="ja-JP" altLang="en-US" sz="2400" dirty="0"/>
+              <a:t>　・エフェクトの再生時間の長さ</a:t>
+            </a:r>
+            <a:endParaRPr lang="en-US" altLang="ja-JP" sz="2400" dirty="0"/>
+          </a:p>
+          <a:p>
+            <a:endParaRPr kumimoji="1" lang="en-US" altLang="ja-JP" sz="2400" dirty="0"/>
+          </a:p>
+          <a:p>
+            <a:r>
+              <a:rPr lang="ja-JP" altLang="en-US" sz="2400" dirty="0"/>
+              <a:t>■パーティクルのスポーン</a:t>
+            </a:r>
+            <a:endParaRPr lang="en-US" altLang="ja-JP" sz="2400" dirty="0"/>
+          </a:p>
+          <a:p>
+            <a:r>
+              <a:rPr lang="ja-JP" altLang="en-US" sz="2400" dirty="0"/>
+              <a:t>・</a:t>
+            </a:r>
+            <a:r>
+              <a:rPr lang="en-US" altLang="ja-JP" sz="2400" dirty="0"/>
+              <a:t>Initialize Particle &gt; </a:t>
+            </a:r>
+            <a:r>
+              <a:rPr kumimoji="1" lang="en-US" altLang="ja-JP" sz="2400" dirty="0"/>
+              <a:t>Life Time</a:t>
+            </a:r>
+            <a:endParaRPr lang="en-US" altLang="ja-JP" sz="2400" dirty="0"/>
+          </a:p>
+          <a:p>
+            <a:r>
+              <a:rPr kumimoji="1" lang="ja-JP" altLang="en-US" sz="2400" dirty="0"/>
+              <a:t>　・粒子の寿命</a:t>
+            </a:r>
+            <a:endParaRPr kumimoji="1" lang="en-US" altLang="ja-JP" sz="2400" dirty="0"/>
+          </a:p>
+          <a:p>
+            <a:endParaRPr lang="en-US" altLang="ja-JP" sz="2400" dirty="0"/>
+          </a:p>
+          <a:p>
+            <a:r>
+              <a:rPr kumimoji="1" lang="en-US" altLang="ja-JP" sz="2400" b="1" dirty="0">
+                <a:solidFill>
+                  <a:srgbClr val="FF0000"/>
+                </a:solidFill>
+              </a:rPr>
+              <a:t>※</a:t>
             </a:r>
             <a:r>
               <a:rPr kumimoji="1" lang="ja-JP" altLang="en-US" sz="2400" b="1" dirty="0">
@@ -4649,69 +4686,20 @@
                   <a:srgbClr val="FF0000"/>
                 </a:solidFill>
               </a:rPr>
-              <a:t>パーティクルの更新</a:t>
-            </a:r>
-            <a:r>
-              <a:rPr kumimoji="1" lang="ja-JP" altLang="en-US" sz="2400" dirty="0"/>
-              <a:t>」に「</a:t>
-            </a:r>
-            <a:r>
-              <a:rPr kumimoji="1" lang="en-US" altLang="ja-JP" sz="2400" b="1" dirty="0">
-                <a:solidFill>
-                  <a:srgbClr val="FF0000"/>
-                </a:solidFill>
-              </a:rPr>
-              <a:t>Gravity Force</a:t>
-            </a:r>
-            <a:r>
-              <a:rPr kumimoji="1" lang="ja-JP" altLang="en-US" sz="2400" dirty="0"/>
-              <a:t>」を追加すると、</a:t>
-            </a:r>
-            <a:endParaRPr kumimoji="1" lang="en-US" altLang="ja-JP" sz="2400" dirty="0"/>
-          </a:p>
-          <a:p>
-            <a:r>
-              <a:rPr lang="ja-JP" altLang="en-US" sz="2400" dirty="0"/>
-              <a:t>粒子に重力がかかります。</a:t>
-            </a:r>
-            <a:endParaRPr kumimoji="1" lang="en-US" altLang="ja-JP" sz="2400" dirty="0"/>
-          </a:p>
-        </p:txBody>
-      </p:sp>
-      <p:pic>
-        <p:nvPicPr>
-          <p:cNvPr id="5" name="図 4">
-            <a:extLst>
-              <a:ext uri="{FF2B5EF4-FFF2-40B4-BE49-F238E27FC236}">
-                <a16:creationId xmlns:a16="http://schemas.microsoft.com/office/drawing/2014/main" id="{8C740B9E-6CF0-41ED-81CD-DC97B5393C62}"/>
-              </a:ext>
-            </a:extLst>
-          </p:cNvPr>
-          <p:cNvPicPr>
-            <a:picLocks noChangeAspect="1"/>
-          </p:cNvPicPr>
-          <p:nvPr/>
-        </p:nvPicPr>
-        <p:blipFill>
-          <a:blip r:embed="rId2"/>
-          <a:stretch>
-            <a:fillRect/>
-          </a:stretch>
-        </p:blipFill>
-        <p:spPr>
-          <a:xfrm>
-            <a:off x="567542" y="2187127"/>
-            <a:ext cx="6017241" cy="4294356"/>
-          </a:xfrm>
-          <a:prstGeom prst="rect">
-            <a:avLst/>
-          </a:prstGeom>
-        </p:spPr>
-      </p:pic>
+              <a:t>完成したらコンパイルして保存しましょう</a:t>
+            </a:r>
+            <a:endParaRPr kumimoji="1" lang="en-US" altLang="ja-JP" sz="2400" b="1" dirty="0">
+              <a:solidFill>
+                <a:srgbClr val="FF0000"/>
+              </a:solidFill>
+            </a:endParaRPr>
+          </a:p>
+        </p:txBody>
+      </p:sp>
     </p:spTree>
     <p:extLst>
       <p:ext uri="{BB962C8B-B14F-4D97-AF65-F5344CB8AC3E}">
-        <p14:creationId xmlns:p14="http://schemas.microsoft.com/office/powerpoint/2010/main" val="1125978900"/>
+        <p14:creationId xmlns:p14="http://schemas.microsoft.com/office/powerpoint/2010/main" val="2314218409"/>
       </p:ext>
     </p:extLst>
   </p:cSld>
@@ -4788,7 +4776,7 @@
         <p:spPr>
           <a:xfrm>
             <a:off x="567542" y="1216429"/>
-            <a:ext cx="8186857" cy="4524315"/>
+            <a:ext cx="7263527" cy="830997"/>
           </a:xfrm>
           <a:prstGeom prst="rect">
             <a:avLst/>
@@ -4802,109 +4790,196 @@
           <a:lstStyle/>
           <a:p>
             <a:r>
-              <a:rPr lang="ja-JP" altLang="en-US" sz="2400" dirty="0"/>
-              <a:t>以下を調整するとエフェクトの再生時間を調整できます。</a:t>
-            </a:r>
-            <a:endParaRPr lang="en-US" altLang="ja-JP" sz="2400" dirty="0"/>
-          </a:p>
-          <a:p>
-            <a:r>
-              <a:rPr lang="ja-JP" altLang="en-US" sz="2400" dirty="0"/>
-              <a:t>色々調節していい感じのエフェクトを作りましょう。</a:t>
-            </a:r>
-            <a:endParaRPr lang="en-US" altLang="ja-JP" sz="2400" dirty="0"/>
-          </a:p>
-          <a:p>
-            <a:endParaRPr lang="en-US" altLang="ja-JP" sz="2400" dirty="0"/>
-          </a:p>
-          <a:p>
-            <a:r>
               <a:rPr kumimoji="1" lang="ja-JP" altLang="en-US" sz="2400" dirty="0"/>
-              <a:t>■エミッタの更新</a:t>
+              <a:t>弾丸がヒットしたときにエフェクトを表示します。</a:t>
             </a:r>
             <a:endParaRPr kumimoji="1" lang="en-US" altLang="ja-JP" sz="2400" dirty="0"/>
           </a:p>
           <a:p>
             <a:r>
-              <a:rPr kumimoji="1" lang="ja-JP" altLang="en-US" sz="2400" dirty="0"/>
-              <a:t>・</a:t>
-            </a:r>
-            <a:r>
-              <a:rPr kumimoji="1" lang="en-US" altLang="ja-JP" sz="2400" dirty="0"/>
-              <a:t>Emitter State &gt; Loop Duration</a:t>
-            </a:r>
-          </a:p>
-          <a:p>
-            <a:r>
-              <a:rPr lang="ja-JP" altLang="en-US" sz="2400" dirty="0"/>
-              <a:t>　・エフェクトの再生時間の長さ</a:t>
-            </a:r>
-            <a:endParaRPr lang="en-US" altLang="ja-JP" sz="2400" dirty="0"/>
-          </a:p>
-          <a:p>
-            <a:endParaRPr kumimoji="1" lang="en-US" altLang="ja-JP" sz="2400" dirty="0"/>
-          </a:p>
-          <a:p>
-            <a:r>
-              <a:rPr lang="ja-JP" altLang="en-US" sz="2400" dirty="0"/>
-              <a:t>■パーティクルのスポーン</a:t>
-            </a:r>
-            <a:endParaRPr lang="en-US" altLang="ja-JP" sz="2400" dirty="0"/>
-          </a:p>
-          <a:p>
-            <a:r>
-              <a:rPr lang="ja-JP" altLang="en-US" sz="2400" dirty="0"/>
-              <a:t>・</a:t>
-            </a:r>
-            <a:r>
-              <a:rPr lang="en-US" altLang="ja-JP" sz="2400" dirty="0"/>
-              <a:t>Initialize Particle &gt; </a:t>
-            </a:r>
-            <a:r>
-              <a:rPr kumimoji="1" lang="en-US" altLang="ja-JP" sz="2400" dirty="0"/>
-              <a:t>Life Time</a:t>
-            </a:r>
-            <a:endParaRPr lang="en-US" altLang="ja-JP" sz="2400" dirty="0"/>
-          </a:p>
-          <a:p>
-            <a:r>
-              <a:rPr kumimoji="1" lang="ja-JP" altLang="en-US" sz="2400" dirty="0"/>
-              <a:t>　・粒子の寿命</a:t>
-            </a:r>
-            <a:endParaRPr kumimoji="1" lang="en-US" altLang="ja-JP" sz="2400" dirty="0"/>
-          </a:p>
-          <a:p>
-            <a:endParaRPr lang="en-US" altLang="ja-JP" sz="2400" dirty="0"/>
-          </a:p>
-          <a:p>
-            <a:r>
-              <a:rPr kumimoji="1" lang="en-US" altLang="ja-JP" sz="2400" b="1" dirty="0">
+              <a:rPr lang="en-US" altLang="ja-JP" sz="2400" b="1" dirty="0" err="1">
                 <a:solidFill>
                   <a:srgbClr val="FF0000"/>
                 </a:solidFill>
               </a:rPr>
-              <a:t>※</a:t>
-            </a:r>
-            <a:r>
-              <a:rPr kumimoji="1" lang="ja-JP" altLang="en-US" sz="2400" b="1" dirty="0">
-                <a:solidFill>
-                  <a:srgbClr val="FF0000"/>
-                </a:solidFill>
-              </a:rPr>
-              <a:t>完成したらコンパイルして保存しましょう</a:t>
-            </a:r>
-            <a:endParaRPr kumimoji="1" lang="en-US" altLang="ja-JP" sz="2400" b="1" dirty="0">
-              <a:solidFill>
-                <a:srgbClr val="FF0000"/>
-              </a:solidFill>
-            </a:endParaRPr>
+              <a:t>NormalBullet.h</a:t>
+            </a:r>
+            <a:r>
+              <a:rPr lang="ja-JP" altLang="en-US" sz="2400" dirty="0"/>
+              <a:t>を書きます。</a:t>
+            </a:r>
+            <a:endParaRPr kumimoji="1" lang="en-US" altLang="ja-JP" sz="2400" dirty="0"/>
+          </a:p>
+        </p:txBody>
+      </p:sp>
+      <p:pic>
+        <p:nvPicPr>
+          <p:cNvPr id="3" name="図 2">
+            <a:extLst>
+              <a:ext uri="{FF2B5EF4-FFF2-40B4-BE49-F238E27FC236}">
+                <a16:creationId xmlns:a16="http://schemas.microsoft.com/office/drawing/2014/main" id="{7FFECBE8-2B0C-43BE-84AC-706B44F1DB69}"/>
+              </a:ext>
+            </a:extLst>
+          </p:cNvPr>
+          <p:cNvPicPr>
+            <a:picLocks noChangeAspect="1"/>
+          </p:cNvPicPr>
+          <p:nvPr/>
+        </p:nvPicPr>
+        <p:blipFill>
+          <a:blip r:embed="rId2"/>
+          <a:stretch>
+            <a:fillRect/>
+          </a:stretch>
+        </p:blipFill>
+        <p:spPr>
+          <a:xfrm>
+            <a:off x="567542" y="2187126"/>
+            <a:ext cx="5029902" cy="1695687"/>
+          </a:xfrm>
+          <a:prstGeom prst="rect">
+            <a:avLst/>
+          </a:prstGeom>
+        </p:spPr>
+      </p:pic>
+      <p:pic>
+        <p:nvPicPr>
+          <p:cNvPr id="7" name="図 6">
+            <a:extLst>
+              <a:ext uri="{FF2B5EF4-FFF2-40B4-BE49-F238E27FC236}">
+                <a16:creationId xmlns:a16="http://schemas.microsoft.com/office/drawing/2014/main" id="{9587DA85-F705-4EFF-8A67-F6F6715AA228}"/>
+              </a:ext>
+            </a:extLst>
+          </p:cNvPr>
+          <p:cNvPicPr>
+            <a:picLocks noChangeAspect="1"/>
+          </p:cNvPicPr>
+          <p:nvPr/>
+        </p:nvPicPr>
+        <p:blipFill>
+          <a:blip r:embed="rId3"/>
+          <a:stretch>
+            <a:fillRect/>
+          </a:stretch>
+        </p:blipFill>
+        <p:spPr>
+          <a:xfrm>
+            <a:off x="578573" y="4022513"/>
+            <a:ext cx="2950664" cy="2503793"/>
+          </a:xfrm>
+          <a:prstGeom prst="rect">
+            <a:avLst/>
+          </a:prstGeom>
+        </p:spPr>
+      </p:pic>
+      <p:sp>
+        <p:nvSpPr>
+          <p:cNvPr id="8" name="正方形/長方形 7">
+            <a:extLst>
+              <a:ext uri="{FF2B5EF4-FFF2-40B4-BE49-F238E27FC236}">
+                <a16:creationId xmlns:a16="http://schemas.microsoft.com/office/drawing/2014/main" id="{3FF728B7-CD3F-47D1-B135-21674D10041C}"/>
+              </a:ext>
+            </a:extLst>
+          </p:cNvPr>
+          <p:cNvSpPr/>
+          <p:nvPr/>
+        </p:nvSpPr>
+        <p:spPr>
+          <a:xfrm>
+            <a:off x="1524000" y="3209365"/>
+            <a:ext cx="2904565" cy="295835"/>
+          </a:xfrm>
+          <a:prstGeom prst="rect">
+            <a:avLst/>
+          </a:prstGeom>
+          <a:noFill/>
+          <a:ln w="38100">
+            <a:solidFill>
+              <a:srgbClr val="FF0000"/>
+            </a:solidFill>
+          </a:ln>
+        </p:spPr>
+        <p:style>
+          <a:lnRef idx="2">
+            <a:schemeClr val="accent1">
+              <a:shade val="50000"/>
+            </a:schemeClr>
+          </a:lnRef>
+          <a:fillRef idx="1">
+            <a:schemeClr val="accent1"/>
+          </a:fillRef>
+          <a:effectRef idx="0">
+            <a:schemeClr val="accent1"/>
+          </a:effectRef>
+          <a:fontRef idx="minor">
+            <a:schemeClr val="lt1"/>
+          </a:fontRef>
+        </p:style>
+        <p:txBody>
+          <a:bodyPr rtlCol="0" anchor="ctr"/>
+          <a:lstStyle/>
+          <a:p>
+            <a:pPr algn="ctr"/>
+            <a:endParaRPr kumimoji="1" lang="ja-JP" altLang="en-US"/>
+          </a:p>
+        </p:txBody>
+      </p:sp>
+      <p:sp>
+        <p:nvSpPr>
+          <p:cNvPr id="9" name="正方形/長方形 8">
+            <a:extLst>
+              <a:ext uri="{FF2B5EF4-FFF2-40B4-BE49-F238E27FC236}">
+                <a16:creationId xmlns:a16="http://schemas.microsoft.com/office/drawing/2014/main" id="{DFDEA610-15DB-4ED2-B864-9FC4800992C4}"/>
+              </a:ext>
+            </a:extLst>
+          </p:cNvPr>
+          <p:cNvSpPr/>
+          <p:nvPr/>
+        </p:nvSpPr>
+        <p:spPr>
+          <a:xfrm>
+            <a:off x="1294740" y="5274409"/>
+            <a:ext cx="2234497" cy="543685"/>
+          </a:xfrm>
+          <a:prstGeom prst="rect">
+            <a:avLst/>
+          </a:prstGeom>
+          <a:noFill/>
+          <a:ln w="38100">
+            <a:solidFill>
+              <a:srgbClr val="FF0000"/>
+            </a:solidFill>
+          </a:ln>
+        </p:spPr>
+        <p:style>
+          <a:lnRef idx="2">
+            <a:schemeClr val="accent1">
+              <a:shade val="50000"/>
+            </a:schemeClr>
+          </a:lnRef>
+          <a:fillRef idx="1">
+            <a:schemeClr val="accent1"/>
+          </a:fillRef>
+          <a:effectRef idx="0">
+            <a:schemeClr val="accent1"/>
+          </a:effectRef>
+          <a:fontRef idx="minor">
+            <a:schemeClr val="lt1"/>
+          </a:fontRef>
+        </p:style>
+        <p:txBody>
+          <a:bodyPr rtlCol="0" anchor="ctr"/>
+          <a:lstStyle/>
+          <a:p>
+            <a:pPr algn="ctr"/>
+            <a:endParaRPr kumimoji="1" lang="ja-JP" altLang="en-US"/>
           </a:p>
         </p:txBody>
       </p:sp>
     </p:spTree>
     <p:extLst>
       <p:ext uri="{BB962C8B-B14F-4D97-AF65-F5344CB8AC3E}">
-        <p14:creationId xmlns:p14="http://schemas.microsoft.com/office/powerpoint/2010/main" val="2314218409"/>
+        <p14:creationId xmlns:p14="http://schemas.microsoft.com/office/powerpoint/2010/main" val="1882664175"/>
       </p:ext>
     </p:extLst>
   </p:cSld>
@@ -4981,7 +5056,7 @@
         <p:spPr>
           <a:xfrm>
             <a:off x="567542" y="1216429"/>
-            <a:ext cx="7263527" cy="830997"/>
+            <a:ext cx="4641014" cy="461665"/>
           </a:xfrm>
           <a:prstGeom prst="rect">
             <a:avLst/>
@@ -4995,19 +5070,12 @@
           <a:lstStyle/>
           <a:p>
             <a:r>
-              <a:rPr kumimoji="1" lang="ja-JP" altLang="en-US" sz="2400" dirty="0"/>
-              <a:t>弾丸がヒットしたときにエフェクトを表示します。</a:t>
-            </a:r>
-            <a:endParaRPr kumimoji="1" lang="en-US" altLang="ja-JP" sz="2400" dirty="0"/>
-          </a:p>
-          <a:p>
-            <a:r>
-              <a:rPr lang="en-US" altLang="ja-JP" sz="2400" b="1" dirty="0" err="1">
+              <a:rPr lang="en-US" altLang="ja-JP" sz="2400" b="1" dirty="0">
                 <a:solidFill>
                   <a:srgbClr val="FF0000"/>
                 </a:solidFill>
               </a:rPr>
-              <a:t>NormalBullet.h</a:t>
+              <a:t>NormalBullet.cpp</a:t>
             </a:r>
             <a:r>
               <a:rPr lang="ja-JP" altLang="en-US" sz="2400" dirty="0"/>
@@ -5019,10 +5087,10 @@
       </p:sp>
       <p:pic>
         <p:nvPicPr>
-          <p:cNvPr id="3" name="図 2">
-            <a:extLst>
-              <a:ext uri="{FF2B5EF4-FFF2-40B4-BE49-F238E27FC236}">
-                <a16:creationId xmlns:a16="http://schemas.microsoft.com/office/drawing/2014/main" id="{7FFECBE8-2B0C-43BE-84AC-706B44F1DB69}"/>
+          <p:cNvPr id="5" name="図 4">
+            <a:extLst>
+              <a:ext uri="{FF2B5EF4-FFF2-40B4-BE49-F238E27FC236}">
+                <a16:creationId xmlns:a16="http://schemas.microsoft.com/office/drawing/2014/main" id="{266C6D79-664A-4513-923F-E1F8B1B382D1}"/>
               </a:ext>
             </a:extLst>
           </p:cNvPr>
@@ -5039,50 +5107,20 @@
         </p:blipFill>
         <p:spPr>
           <a:xfrm>
-            <a:off x="567542" y="2187126"/>
-            <a:ext cx="5029902" cy="1695687"/>
+            <a:off x="549674" y="1822276"/>
+            <a:ext cx="4620270" cy="847843"/>
           </a:xfrm>
           <a:prstGeom prst="rect">
             <a:avLst/>
           </a:prstGeom>
         </p:spPr>
       </p:pic>
-      <p:pic>
-        <p:nvPicPr>
-          <p:cNvPr id="7" name="図 6">
-            <a:extLst>
-              <a:ext uri="{FF2B5EF4-FFF2-40B4-BE49-F238E27FC236}">
-                <a16:creationId xmlns:a16="http://schemas.microsoft.com/office/drawing/2014/main" id="{9587DA85-F705-4EFF-8A67-F6F6715AA228}"/>
-              </a:ext>
-            </a:extLst>
-          </p:cNvPr>
-          <p:cNvPicPr>
-            <a:picLocks noChangeAspect="1"/>
-          </p:cNvPicPr>
-          <p:nvPr/>
-        </p:nvPicPr>
-        <p:blipFill>
-          <a:blip r:embed="rId3"/>
-          <a:stretch>
-            <a:fillRect/>
-          </a:stretch>
-        </p:blipFill>
-        <p:spPr>
-          <a:xfrm>
-            <a:off x="578573" y="4022513"/>
-            <a:ext cx="2950664" cy="2503793"/>
-          </a:xfrm>
-          <a:prstGeom prst="rect">
-            <a:avLst/>
-          </a:prstGeom>
-        </p:spPr>
-      </p:pic>
-      <p:sp>
-        <p:nvSpPr>
-          <p:cNvPr id="8" name="正方形/長方形 7">
-            <a:extLst>
-              <a:ext uri="{FF2B5EF4-FFF2-40B4-BE49-F238E27FC236}">
-                <a16:creationId xmlns:a16="http://schemas.microsoft.com/office/drawing/2014/main" id="{3FF728B7-CD3F-47D1-B135-21674D10041C}"/>
+      <p:sp>
+        <p:nvSpPr>
+          <p:cNvPr id="10" name="正方形/長方形 9">
+            <a:extLst>
+              <a:ext uri="{FF2B5EF4-FFF2-40B4-BE49-F238E27FC236}">
+                <a16:creationId xmlns:a16="http://schemas.microsoft.com/office/drawing/2014/main" id="{E52F2C03-27A0-40D6-BC81-04BCFCF7B932}"/>
               </a:ext>
             </a:extLst>
           </p:cNvPr>
@@ -5091,8 +5129,8 @@
         </p:nvSpPr>
         <p:spPr>
           <a:xfrm>
-            <a:off x="1524000" y="3209365"/>
-            <a:ext cx="2904565" cy="295835"/>
+            <a:off x="1348528" y="2196353"/>
+            <a:ext cx="3821416" cy="313765"/>
           </a:xfrm>
           <a:prstGeom prst="rect">
             <a:avLst/>
@@ -5129,12 +5167,42 @@
           </a:p>
         </p:txBody>
       </p:sp>
-      <p:sp>
-        <p:nvSpPr>
-          <p:cNvPr id="9" name="正方形/長方形 8">
-            <a:extLst>
-              <a:ext uri="{FF2B5EF4-FFF2-40B4-BE49-F238E27FC236}">
-                <a16:creationId xmlns:a16="http://schemas.microsoft.com/office/drawing/2014/main" id="{DFDEA610-15DB-4ED2-B864-9FC4800992C4}"/>
+      <p:pic>
+        <p:nvPicPr>
+          <p:cNvPr id="12" name="図 11">
+            <a:extLst>
+              <a:ext uri="{FF2B5EF4-FFF2-40B4-BE49-F238E27FC236}">
+                <a16:creationId xmlns:a16="http://schemas.microsoft.com/office/drawing/2014/main" id="{8A1BA09B-510A-4442-B524-D07F72A96B69}"/>
+              </a:ext>
+            </a:extLst>
+          </p:cNvPr>
+          <p:cNvPicPr>
+            <a:picLocks noChangeAspect="1"/>
+          </p:cNvPicPr>
+          <p:nvPr/>
+        </p:nvPicPr>
+        <p:blipFill>
+          <a:blip r:embed="rId3"/>
+          <a:stretch>
+            <a:fillRect/>
+          </a:stretch>
+        </p:blipFill>
+        <p:spPr>
+          <a:xfrm>
+            <a:off x="567543" y="2884195"/>
+            <a:ext cx="8549564" cy="3525889"/>
+          </a:xfrm>
+          <a:prstGeom prst="rect">
+            <a:avLst/>
+          </a:prstGeom>
+        </p:spPr>
+      </p:pic>
+      <p:sp>
+        <p:nvSpPr>
+          <p:cNvPr id="13" name="正方形/長方形 12">
+            <a:extLst>
+              <a:ext uri="{FF2B5EF4-FFF2-40B4-BE49-F238E27FC236}">
+                <a16:creationId xmlns:a16="http://schemas.microsoft.com/office/drawing/2014/main" id="{8B009787-7A4C-47A6-BC1B-AE9939E08518}"/>
               </a:ext>
             </a:extLst>
           </p:cNvPr>
@@ -5143,8 +5211,8 @@
         </p:nvSpPr>
         <p:spPr>
           <a:xfrm>
-            <a:off x="1294740" y="5274409"/>
-            <a:ext cx="2234497" cy="543685"/>
+            <a:off x="1841585" y="4414056"/>
+            <a:ext cx="7275521" cy="1117168"/>
           </a:xfrm>
           <a:prstGeom prst="rect">
             <a:avLst/>
@@ -5184,7 +5252,7 @@
     </p:spTree>
     <p:extLst>
       <p:ext uri="{BB962C8B-B14F-4D97-AF65-F5344CB8AC3E}">
-        <p14:creationId xmlns:p14="http://schemas.microsoft.com/office/powerpoint/2010/main" val="1882664175"/>
+        <p14:creationId xmlns:p14="http://schemas.microsoft.com/office/powerpoint/2010/main" val="793751702"/>
       </p:ext>
     </p:extLst>
   </p:cSld>
@@ -5261,7 +5329,7 @@
         <p:spPr>
           <a:xfrm>
             <a:off x="567542" y="1216429"/>
-            <a:ext cx="4641014" cy="461665"/>
+            <a:ext cx="7523213" cy="461665"/>
           </a:xfrm>
           <a:prstGeom prst="rect">
             <a:avLst/>
@@ -5275,16 +5343,16 @@
           <a:lstStyle/>
           <a:p>
             <a:r>
-              <a:rPr lang="en-US" altLang="ja-JP" sz="2400" b="1" dirty="0">
+              <a:rPr kumimoji="1" lang="en-US" altLang="ja-JP" sz="2400" b="1" dirty="0" err="1">
                 <a:solidFill>
-                  <a:srgbClr val="FF0000"/>
+                  <a:srgbClr val="0070C0"/>
                 </a:solidFill>
               </a:rPr>
-              <a:t>NormalBullet.cpp</a:t>
-            </a:r>
-            <a:r>
-              <a:rPr lang="ja-JP" altLang="en-US" sz="2400" dirty="0"/>
-              <a:t>を書きます。</a:t>
+              <a:t>BP_PlayerBullet</a:t>
+            </a:r>
+            <a:r>
+              <a:rPr kumimoji="1" lang="ja-JP" altLang="en-US" sz="2400" dirty="0"/>
+              <a:t>でヒットエフェクトを設定します。</a:t>
             </a:r>
             <a:endParaRPr kumimoji="1" lang="en-US" altLang="ja-JP" sz="2400" dirty="0"/>
           </a:p>
@@ -5292,10 +5360,10 @@
       </p:sp>
       <p:pic>
         <p:nvPicPr>
-          <p:cNvPr id="5" name="図 4">
-            <a:extLst>
-              <a:ext uri="{FF2B5EF4-FFF2-40B4-BE49-F238E27FC236}">
-                <a16:creationId xmlns:a16="http://schemas.microsoft.com/office/drawing/2014/main" id="{266C6D79-664A-4513-923F-E1F8B1B382D1}"/>
+          <p:cNvPr id="3" name="図 2">
+            <a:extLst>
+              <a:ext uri="{FF2B5EF4-FFF2-40B4-BE49-F238E27FC236}">
+                <a16:creationId xmlns:a16="http://schemas.microsoft.com/office/drawing/2014/main" id="{DC3F79C2-CFC4-43E7-8DC0-097405EB01C8}"/>
               </a:ext>
             </a:extLst>
           </p:cNvPr>
@@ -5312,152 +5380,18 @@
         </p:blipFill>
         <p:spPr>
           <a:xfrm>
-            <a:off x="549674" y="1822276"/>
-            <a:ext cx="4620270" cy="847843"/>
+            <a:off x="567542" y="1817793"/>
+            <a:ext cx="7828702" cy="3345877"/>
           </a:xfrm>
           <a:prstGeom prst="rect">
             <a:avLst/>
           </a:prstGeom>
         </p:spPr>
       </p:pic>
-      <p:sp>
-        <p:nvSpPr>
-          <p:cNvPr id="10" name="正方形/長方形 9">
-            <a:extLst>
-              <a:ext uri="{FF2B5EF4-FFF2-40B4-BE49-F238E27FC236}">
-                <a16:creationId xmlns:a16="http://schemas.microsoft.com/office/drawing/2014/main" id="{E52F2C03-27A0-40D6-BC81-04BCFCF7B932}"/>
-              </a:ext>
-            </a:extLst>
-          </p:cNvPr>
-          <p:cNvSpPr/>
-          <p:nvPr/>
-        </p:nvSpPr>
-        <p:spPr>
-          <a:xfrm>
-            <a:off x="1348528" y="2196353"/>
-            <a:ext cx="3821416" cy="313765"/>
-          </a:xfrm>
-          <a:prstGeom prst="rect">
-            <a:avLst/>
-          </a:prstGeom>
-          <a:noFill/>
-          <a:ln w="38100">
-            <a:solidFill>
-              <a:srgbClr val="FF0000"/>
-            </a:solidFill>
-          </a:ln>
-        </p:spPr>
-        <p:style>
-          <a:lnRef idx="2">
-            <a:schemeClr val="accent1">
-              <a:shade val="50000"/>
-            </a:schemeClr>
-          </a:lnRef>
-          <a:fillRef idx="1">
-            <a:schemeClr val="accent1"/>
-          </a:fillRef>
-          <a:effectRef idx="0">
-            <a:schemeClr val="accent1"/>
-          </a:effectRef>
-          <a:fontRef idx="minor">
-            <a:schemeClr val="lt1"/>
-          </a:fontRef>
-        </p:style>
-        <p:txBody>
-          <a:bodyPr rtlCol="0" anchor="ctr"/>
-          <a:lstStyle/>
-          <a:p>
-            <a:pPr algn="ctr"/>
-            <a:endParaRPr kumimoji="1" lang="ja-JP" altLang="en-US"/>
-          </a:p>
-        </p:txBody>
-      </p:sp>
-      <p:pic>
-        <p:nvPicPr>
-          <p:cNvPr id="12" name="図 11">
-            <a:extLst>
-              <a:ext uri="{FF2B5EF4-FFF2-40B4-BE49-F238E27FC236}">
-                <a16:creationId xmlns:a16="http://schemas.microsoft.com/office/drawing/2014/main" id="{8A1BA09B-510A-4442-B524-D07F72A96B69}"/>
-              </a:ext>
-            </a:extLst>
-          </p:cNvPr>
-          <p:cNvPicPr>
-            <a:picLocks noChangeAspect="1"/>
-          </p:cNvPicPr>
-          <p:nvPr/>
-        </p:nvPicPr>
-        <p:blipFill>
-          <a:blip r:embed="rId3"/>
-          <a:stretch>
-            <a:fillRect/>
-          </a:stretch>
-        </p:blipFill>
-        <p:spPr>
-          <a:xfrm>
-            <a:off x="567543" y="2884195"/>
-            <a:ext cx="8549564" cy="3525889"/>
-          </a:xfrm>
-          <a:prstGeom prst="rect">
-            <a:avLst/>
-          </a:prstGeom>
-        </p:spPr>
-      </p:pic>
-      <p:sp>
-        <p:nvSpPr>
-          <p:cNvPr id="13" name="正方形/長方形 12">
-            <a:extLst>
-              <a:ext uri="{FF2B5EF4-FFF2-40B4-BE49-F238E27FC236}">
-                <a16:creationId xmlns:a16="http://schemas.microsoft.com/office/drawing/2014/main" id="{8B009787-7A4C-47A6-BC1B-AE9939E08518}"/>
-              </a:ext>
-            </a:extLst>
-          </p:cNvPr>
-          <p:cNvSpPr/>
-          <p:nvPr/>
-        </p:nvSpPr>
-        <p:spPr>
-          <a:xfrm>
-            <a:off x="1841585" y="4414056"/>
-            <a:ext cx="7275521" cy="1117168"/>
-          </a:xfrm>
-          <a:prstGeom prst="rect">
-            <a:avLst/>
-          </a:prstGeom>
-          <a:noFill/>
-          <a:ln w="38100">
-            <a:solidFill>
-              <a:srgbClr val="FF0000"/>
-            </a:solidFill>
-          </a:ln>
-        </p:spPr>
-        <p:style>
-          <a:lnRef idx="2">
-            <a:schemeClr val="accent1">
-              <a:shade val="50000"/>
-            </a:schemeClr>
-          </a:lnRef>
-          <a:fillRef idx="1">
-            <a:schemeClr val="accent1"/>
-          </a:fillRef>
-          <a:effectRef idx="0">
-            <a:schemeClr val="accent1"/>
-          </a:effectRef>
-          <a:fontRef idx="minor">
-            <a:schemeClr val="lt1"/>
-          </a:fontRef>
-        </p:style>
-        <p:txBody>
-          <a:bodyPr rtlCol="0" anchor="ctr"/>
-          <a:lstStyle/>
-          <a:p>
-            <a:pPr algn="ctr"/>
-            <a:endParaRPr kumimoji="1" lang="ja-JP" altLang="en-US"/>
-          </a:p>
-        </p:txBody>
-      </p:sp>
     </p:spTree>
     <p:extLst>
       <p:ext uri="{BB962C8B-B14F-4D97-AF65-F5344CB8AC3E}">
-        <p14:creationId xmlns:p14="http://schemas.microsoft.com/office/powerpoint/2010/main" val="793751702"/>
+        <p14:creationId xmlns:p14="http://schemas.microsoft.com/office/powerpoint/2010/main" val="3461068415"/>
       </p:ext>
     </p:extLst>
   </p:cSld>
@@ -5534,7 +5468,7 @@
         <p:spPr>
           <a:xfrm>
             <a:off x="567542" y="1216429"/>
-            <a:ext cx="7523213" cy="461665"/>
+            <a:ext cx="3262432" cy="461665"/>
           </a:xfrm>
           <a:prstGeom prst="rect">
             <a:avLst/>
@@ -5548,16 +5482,8 @@
           <a:lstStyle/>
           <a:p>
             <a:r>
-              <a:rPr kumimoji="1" lang="en-US" altLang="ja-JP" sz="2400" b="1" dirty="0" err="1">
-                <a:solidFill>
-                  <a:srgbClr val="0070C0"/>
-                </a:solidFill>
-              </a:rPr>
-              <a:t>BP_PlayerBullet</a:t>
-            </a:r>
-            <a:r>
               <a:rPr kumimoji="1" lang="ja-JP" altLang="en-US" sz="2400" dirty="0"/>
-              <a:t>でヒットエフェクトを設定します。</a:t>
+              <a:t>動作確認しましょう。</a:t>
             </a:r>
             <a:endParaRPr kumimoji="1" lang="en-US" altLang="ja-JP" sz="2400" dirty="0"/>
           </a:p>
@@ -5565,10 +5491,10 @@
       </p:sp>
       <p:pic>
         <p:nvPicPr>
-          <p:cNvPr id="3" name="図 2">
-            <a:extLst>
-              <a:ext uri="{FF2B5EF4-FFF2-40B4-BE49-F238E27FC236}">
-                <a16:creationId xmlns:a16="http://schemas.microsoft.com/office/drawing/2014/main" id="{DC3F79C2-CFC4-43E7-8DC0-097405EB01C8}"/>
+          <p:cNvPr id="5" name="図 4">
+            <a:extLst>
+              <a:ext uri="{FF2B5EF4-FFF2-40B4-BE49-F238E27FC236}">
+                <a16:creationId xmlns:a16="http://schemas.microsoft.com/office/drawing/2014/main" id="{B9E8BDC1-5354-4714-8F0F-52A95295993F}"/>
               </a:ext>
             </a:extLst>
           </p:cNvPr>
@@ -5585,8 +5511,8 @@
         </p:blipFill>
         <p:spPr>
           <a:xfrm>
-            <a:off x="567542" y="1817793"/>
-            <a:ext cx="7828702" cy="3345877"/>
+            <a:off x="567542" y="1817794"/>
+            <a:ext cx="8901956" cy="4358888"/>
           </a:xfrm>
           <a:prstGeom prst="rect">
             <a:avLst/>
@@ -5596,7 +5522,7 @@
     </p:spTree>
     <p:extLst>
       <p:ext uri="{BB962C8B-B14F-4D97-AF65-F5344CB8AC3E}">
-        <p14:creationId xmlns:p14="http://schemas.microsoft.com/office/powerpoint/2010/main" val="3461068415"/>
+        <p14:creationId xmlns:p14="http://schemas.microsoft.com/office/powerpoint/2010/main" val="842072476"/>
       </p:ext>
     </p:extLst>
   </p:cSld>
@@ -5673,7 +5599,7 @@
         <p:spPr>
           <a:xfrm>
             <a:off x="567542" y="1216429"/>
-            <a:ext cx="3262432" cy="461665"/>
+            <a:ext cx="8186857" cy="830997"/>
           </a:xfrm>
           <a:prstGeom prst="rect">
             <a:avLst/>
@@ -5688,7 +5614,14 @@
           <a:p>
             <a:r>
               <a:rPr kumimoji="1" lang="ja-JP" altLang="en-US" sz="2400" dirty="0"/>
-              <a:t>動作確認しましょう。</a:t>
+              <a:t>ナイアガラエフェクトには様々な機能が他にもあります。</a:t>
+            </a:r>
+            <a:endParaRPr kumimoji="1" lang="en-US" altLang="ja-JP" sz="2400" dirty="0"/>
+          </a:p>
+          <a:p>
+            <a:r>
+              <a:rPr lang="ja-JP" altLang="en-US" sz="2400" dirty="0"/>
+              <a:t>制作を通じて学習していきましょう。</a:t>
             </a:r>
             <a:endParaRPr kumimoji="1" lang="en-US" altLang="ja-JP" sz="2400" dirty="0"/>
           </a:p>
@@ -5696,10 +5629,10 @@
       </p:sp>
       <p:pic>
         <p:nvPicPr>
-          <p:cNvPr id="5" name="図 4">
-            <a:extLst>
-              <a:ext uri="{FF2B5EF4-FFF2-40B4-BE49-F238E27FC236}">
-                <a16:creationId xmlns:a16="http://schemas.microsoft.com/office/drawing/2014/main" id="{B9E8BDC1-5354-4714-8F0F-52A95295993F}"/>
+          <p:cNvPr id="7" name="図 6">
+            <a:extLst>
+              <a:ext uri="{FF2B5EF4-FFF2-40B4-BE49-F238E27FC236}">
+                <a16:creationId xmlns:a16="http://schemas.microsoft.com/office/drawing/2014/main" id="{5BF3A4D8-638D-4C0D-AB4E-6FEFB8D00EFE}"/>
               </a:ext>
             </a:extLst>
           </p:cNvPr>
@@ -5716,8 +5649,8 @@
         </p:blipFill>
         <p:spPr>
           <a:xfrm>
-            <a:off x="567542" y="1817794"/>
-            <a:ext cx="8901956" cy="4358888"/>
+            <a:off x="567542" y="2187126"/>
+            <a:ext cx="7778599" cy="4179122"/>
           </a:xfrm>
           <a:prstGeom prst="rect">
             <a:avLst/>
@@ -5727,7 +5660,7 @@
     </p:spTree>
     <p:extLst>
       <p:ext uri="{BB962C8B-B14F-4D97-AF65-F5344CB8AC3E}">
-        <p14:creationId xmlns:p14="http://schemas.microsoft.com/office/powerpoint/2010/main" val="842072476"/>
+        <p14:creationId xmlns:p14="http://schemas.microsoft.com/office/powerpoint/2010/main" val="1732048641"/>
       </p:ext>
     </p:extLst>
   </p:cSld>
@@ -5866,144 +5799,6 @@
     <p:extLst>
       <p:ext uri="{BB962C8B-B14F-4D97-AF65-F5344CB8AC3E}">
         <p14:creationId xmlns:p14="http://schemas.microsoft.com/office/powerpoint/2010/main" val="4213198082"/>
-      </p:ext>
-    </p:extLst>
-  </p:cSld>
-  <p:clrMapOvr>
-    <a:masterClrMapping/>
-  </p:clrMapOvr>
-</p:sld>
-</file>
-
-<file path=ppt/slides/slide20.xml><?xml version="1.0" encoding="utf-8"?>
-<p:sld xmlns:a="http://schemas.openxmlformats.org/drawingml/2006/main" xmlns:r="http://schemas.openxmlformats.org/officeDocument/2006/relationships" xmlns:p="http://schemas.openxmlformats.org/presentationml/2006/main">
-  <p:cSld>
-    <p:spTree>
-      <p:nvGrpSpPr>
-        <p:cNvPr id="1" name=""/>
-        <p:cNvGrpSpPr/>
-        <p:nvPr/>
-      </p:nvGrpSpPr>
-      <p:grpSpPr>
-        <a:xfrm>
-          <a:off x="0" y="0"/>
-          <a:ext cx="0" cy="0"/>
-          <a:chOff x="0" y="0"/>
-          <a:chExt cx="0" cy="0"/>
-        </a:xfrm>
-      </p:grpSpPr>
-      <p:sp>
-        <p:nvSpPr>
-          <p:cNvPr id="4" name="テキスト ボックス 3">
-            <a:extLst>
-              <a:ext uri="{FF2B5EF4-FFF2-40B4-BE49-F238E27FC236}">
-                <a16:creationId xmlns:a16="http://schemas.microsoft.com/office/drawing/2014/main" id="{5A13BF46-B8C5-48AA-8308-C9ECFF431A18}"/>
-              </a:ext>
-            </a:extLst>
-          </p:cNvPr>
-          <p:cNvSpPr txBox="1"/>
-          <p:nvPr/>
-        </p:nvSpPr>
-        <p:spPr>
-          <a:xfrm>
-            <a:off x="567542" y="491954"/>
-            <a:ext cx="4288353" cy="584775"/>
-          </a:xfrm>
-          <a:prstGeom prst="rect">
-            <a:avLst/>
-          </a:prstGeom>
-          <a:noFill/>
-        </p:spPr>
-        <p:txBody>
-          <a:bodyPr wrap="none" rtlCol="0">
-            <a:spAutoFit/>
-          </a:bodyPr>
-          <a:lstStyle/>
-          <a:p>
-            <a:r>
-              <a:rPr kumimoji="1" lang="ja-JP" altLang="en-US" sz="3200" b="1" u="sng" dirty="0"/>
-              <a:t>ナイアガラエフェクト</a:t>
-            </a:r>
-          </a:p>
-        </p:txBody>
-      </p:sp>
-      <p:sp>
-        <p:nvSpPr>
-          <p:cNvPr id="6" name="テキスト ボックス 5">
-            <a:extLst>
-              <a:ext uri="{FF2B5EF4-FFF2-40B4-BE49-F238E27FC236}">
-                <a16:creationId xmlns:a16="http://schemas.microsoft.com/office/drawing/2014/main" id="{55830AD6-028B-4C4E-80BF-B70DFC1C3A46}"/>
-              </a:ext>
-            </a:extLst>
-          </p:cNvPr>
-          <p:cNvSpPr txBox="1"/>
-          <p:nvPr/>
-        </p:nvSpPr>
-        <p:spPr>
-          <a:xfrm>
-            <a:off x="567542" y="1216429"/>
-            <a:ext cx="8186857" cy="830997"/>
-          </a:xfrm>
-          <a:prstGeom prst="rect">
-            <a:avLst/>
-          </a:prstGeom>
-          <a:noFill/>
-        </p:spPr>
-        <p:txBody>
-          <a:bodyPr wrap="none" rtlCol="0">
-            <a:spAutoFit/>
-          </a:bodyPr>
-          <a:lstStyle/>
-          <a:p>
-            <a:r>
-              <a:rPr kumimoji="1" lang="ja-JP" altLang="en-US" sz="2400" dirty="0"/>
-              <a:t>ナイアガラエフェクトには様々な機能が他にもあります。</a:t>
-            </a:r>
-            <a:endParaRPr kumimoji="1" lang="en-US" altLang="ja-JP" sz="2400" dirty="0"/>
-          </a:p>
-          <a:p>
-            <a:r>
-              <a:rPr lang="ja-JP" altLang="en-US" sz="2400" dirty="0"/>
-              <a:t>制作を通じて学習していきましょう。</a:t>
-            </a:r>
-            <a:endParaRPr kumimoji="1" lang="en-US" altLang="ja-JP" sz="2400" dirty="0"/>
-          </a:p>
-        </p:txBody>
-      </p:sp>
-      <p:pic>
-        <p:nvPicPr>
-          <p:cNvPr id="7" name="図 6">
-            <a:extLst>
-              <a:ext uri="{FF2B5EF4-FFF2-40B4-BE49-F238E27FC236}">
-                <a16:creationId xmlns:a16="http://schemas.microsoft.com/office/drawing/2014/main" id="{5BF3A4D8-638D-4C0D-AB4E-6FEFB8D00EFE}"/>
-              </a:ext>
-            </a:extLst>
-          </p:cNvPr>
-          <p:cNvPicPr>
-            <a:picLocks noChangeAspect="1"/>
-          </p:cNvPicPr>
-          <p:nvPr/>
-        </p:nvPicPr>
-        <p:blipFill>
-          <a:blip r:embed="rId2"/>
-          <a:stretch>
-            <a:fillRect/>
-          </a:stretch>
-        </p:blipFill>
-        <p:spPr>
-          <a:xfrm>
-            <a:off x="567542" y="2187126"/>
-            <a:ext cx="7778599" cy="4179122"/>
-          </a:xfrm>
-          <a:prstGeom prst="rect">
-            <a:avLst/>
-          </a:prstGeom>
-        </p:spPr>
-      </p:pic>
-    </p:spTree>
-    <p:extLst>
-      <p:ext uri="{BB962C8B-B14F-4D97-AF65-F5344CB8AC3E}">
-        <p14:creationId xmlns:p14="http://schemas.microsoft.com/office/powerpoint/2010/main" val="1732048641"/>
       </p:ext>
     </p:extLst>
   </p:cSld>
@@ -6526,7 +6321,7 @@
         <p:spPr>
           <a:xfrm>
             <a:off x="567542" y="1216429"/>
-            <a:ext cx="8494633" cy="3416320"/>
+            <a:ext cx="11416908" cy="830997"/>
           </a:xfrm>
           <a:prstGeom prst="rect">
             <a:avLst/>
@@ -6541,80 +6336,77 @@
           <a:p>
             <a:r>
               <a:rPr kumimoji="1" lang="ja-JP" altLang="en-US" sz="2400" dirty="0"/>
-              <a:t>ナイアガラは主に以下の</a:t>
-            </a:r>
+              <a:t>まずは発生させる粒子の数を設定します。</a:t>
+            </a:r>
+            <a:endParaRPr kumimoji="1" lang="en-US" altLang="ja-JP" sz="2400" dirty="0"/>
+          </a:p>
+          <a:p>
             <a:r>
               <a:rPr lang="ja-JP" altLang="en-US" sz="2400" dirty="0"/>
-              <a:t>２つの要素から構成されています。</a:t>
-            </a:r>
-            <a:endParaRPr lang="en-US" altLang="ja-JP" sz="2400" dirty="0"/>
-          </a:p>
-          <a:p>
-            <a:endParaRPr kumimoji="1" lang="en-US" altLang="ja-JP" sz="2400" dirty="0"/>
-          </a:p>
-          <a:p>
+              <a:t>「</a:t>
+            </a:r>
             <a:r>
               <a:rPr lang="ja-JP" altLang="en-US" sz="2400" b="1" dirty="0">
                 <a:solidFill>
                   <a:srgbClr val="FF0000"/>
                 </a:solidFill>
               </a:rPr>
-              <a:t>■エミッター</a:t>
-            </a:r>
-            <a:endParaRPr lang="en-US" altLang="ja-JP" sz="2400" b="1" dirty="0">
-              <a:solidFill>
-                <a:srgbClr val="FF0000"/>
-              </a:solidFill>
-            </a:endParaRPr>
-          </a:p>
-          <a:p>
-            <a:r>
-              <a:rPr kumimoji="1" lang="ja-JP" altLang="en-US" sz="2400" dirty="0"/>
-              <a:t>エフェクトを発生させるもの。</a:t>
-            </a:r>
-            <a:endParaRPr kumimoji="1" lang="en-US" altLang="ja-JP" sz="2400" dirty="0"/>
-          </a:p>
-          <a:p>
-            <a:endParaRPr lang="en-US" altLang="ja-JP" sz="2400" dirty="0"/>
-          </a:p>
-          <a:p>
-            <a:r>
-              <a:rPr kumimoji="1" lang="ja-JP" altLang="en-US" sz="2400" b="1" dirty="0">
+              <a:t>エミッタの更新</a:t>
+            </a:r>
+            <a:r>
+              <a:rPr lang="ja-JP" altLang="en-US" sz="2400" dirty="0"/>
+              <a:t>」にある「</a:t>
+            </a:r>
+            <a:r>
+              <a:rPr lang="en-US" altLang="ja-JP" sz="2400" b="1" dirty="0">
                 <a:solidFill>
                   <a:srgbClr val="FF0000"/>
                 </a:solidFill>
               </a:rPr>
-              <a:t>■パーティクル</a:t>
-            </a:r>
-            <a:endParaRPr kumimoji="1" lang="en-US" altLang="ja-JP" sz="2400" b="1" dirty="0">
-              <a:solidFill>
-                <a:srgbClr val="FF0000"/>
-              </a:solidFill>
-            </a:endParaRPr>
-          </a:p>
-          <a:p>
+              <a:t>Spawn Burst Instantaneous</a:t>
+            </a:r>
             <a:r>
               <a:rPr lang="ja-JP" altLang="en-US" sz="2400" dirty="0"/>
-              <a:t>エフェクトで表示される１つ１つの粒子</a:t>
-            </a:r>
-            <a:endParaRPr lang="en-US" altLang="ja-JP" sz="2400" dirty="0"/>
-          </a:p>
-          <a:p>
+              <a:t>」を選択しましょう。</a:t>
+            </a:r>
             <a:endParaRPr kumimoji="1" lang="en-US" altLang="ja-JP" sz="2400" dirty="0"/>
           </a:p>
-          <a:p>
-            <a:r>
-              <a:rPr lang="ja-JP" altLang="en-US" sz="2400" dirty="0"/>
-              <a:t>これらを設定してエフェクトを作っていきます。</a:t>
-            </a:r>
-            <a:endParaRPr kumimoji="1" lang="en-US" altLang="ja-JP" sz="2400" dirty="0"/>
-          </a:p>
-        </p:txBody>
-      </p:sp>
+        </p:txBody>
+      </p:sp>
+      <p:pic>
+        <p:nvPicPr>
+          <p:cNvPr id="3" name="図 2">
+            <a:extLst>
+              <a:ext uri="{FF2B5EF4-FFF2-40B4-BE49-F238E27FC236}">
+                <a16:creationId xmlns:a16="http://schemas.microsoft.com/office/drawing/2014/main" id="{36A20B82-9EEA-42E5-9D2F-ECC7E7B5BDAD}"/>
+              </a:ext>
+            </a:extLst>
+          </p:cNvPr>
+          <p:cNvPicPr>
+            <a:picLocks noChangeAspect="1"/>
+          </p:cNvPicPr>
+          <p:nvPr/>
+        </p:nvPicPr>
+        <p:blipFill>
+          <a:blip r:embed="rId2"/>
+          <a:stretch>
+            <a:fillRect/>
+          </a:stretch>
+        </p:blipFill>
+        <p:spPr>
+          <a:xfrm>
+            <a:off x="567542" y="2187126"/>
+            <a:ext cx="2489423" cy="4496314"/>
+          </a:xfrm>
+          <a:prstGeom prst="rect">
+            <a:avLst/>
+          </a:prstGeom>
+        </p:spPr>
+      </p:pic>
     </p:spTree>
     <p:extLst>
       <p:ext uri="{BB962C8B-B14F-4D97-AF65-F5344CB8AC3E}">
-        <p14:creationId xmlns:p14="http://schemas.microsoft.com/office/powerpoint/2010/main" val="284364871"/>
+        <p14:creationId xmlns:p14="http://schemas.microsoft.com/office/powerpoint/2010/main" val="2586179459"/>
       </p:ext>
     </p:extLst>
   </p:cSld>
@@ -6691,7 +6483,7 @@
         <p:spPr>
           <a:xfrm>
             <a:off x="567542" y="1216429"/>
-            <a:ext cx="11416908" cy="830997"/>
+            <a:ext cx="7736413" cy="461665"/>
           </a:xfrm>
           <a:prstGeom prst="rect">
             <a:avLst/>
@@ -6706,38 +6498,19 @@
           <a:p>
             <a:r>
               <a:rPr kumimoji="1" lang="ja-JP" altLang="en-US" sz="2400" dirty="0"/>
-              <a:t>まずは発生させる粒子の数を設定します。</a:t>
-            </a:r>
-            <a:endParaRPr kumimoji="1" lang="en-US" altLang="ja-JP" sz="2400" dirty="0"/>
-          </a:p>
-          <a:p>
-            <a:r>
-              <a:rPr lang="ja-JP" altLang="en-US" sz="2400" dirty="0"/>
-              <a:t>「</a:t>
-            </a:r>
-            <a:r>
-              <a:rPr lang="ja-JP" altLang="en-US" sz="2400" b="1" dirty="0">
+              <a:t>詳細の「</a:t>
+            </a:r>
+            <a:r>
+              <a:rPr kumimoji="1" lang="en-US" altLang="ja-JP" sz="2400" b="1" dirty="0">
                 <a:solidFill>
                   <a:srgbClr val="FF0000"/>
                 </a:solidFill>
               </a:rPr>
-              <a:t>エミッタの更新</a:t>
-            </a:r>
-            <a:r>
-              <a:rPr lang="ja-JP" altLang="en-US" sz="2400" dirty="0"/>
-              <a:t>」にある「</a:t>
-            </a:r>
-            <a:r>
-              <a:rPr lang="en-US" altLang="ja-JP" sz="2400" b="1" dirty="0">
-                <a:solidFill>
-                  <a:srgbClr val="FF0000"/>
-                </a:solidFill>
-              </a:rPr>
-              <a:t>Spawn Burst Instantaneous</a:t>
-            </a:r>
-            <a:r>
-              <a:rPr lang="ja-JP" altLang="en-US" sz="2400" dirty="0"/>
-              <a:t>」を選択しましょう。</a:t>
+              <a:t>Spawn Count</a:t>
+            </a:r>
+            <a:r>
+              <a:rPr kumimoji="1" lang="ja-JP" altLang="en-US" sz="2400" dirty="0"/>
+              <a:t>」で粒子の数を設定できます。</a:t>
             </a:r>
             <a:endParaRPr kumimoji="1" lang="en-US" altLang="ja-JP" sz="2400" dirty="0"/>
           </a:p>
@@ -6745,10 +6518,10 @@
       </p:sp>
       <p:pic>
         <p:nvPicPr>
-          <p:cNvPr id="3" name="図 2">
-            <a:extLst>
-              <a:ext uri="{FF2B5EF4-FFF2-40B4-BE49-F238E27FC236}">
-                <a16:creationId xmlns:a16="http://schemas.microsoft.com/office/drawing/2014/main" id="{36A20B82-9EEA-42E5-9D2F-ECC7E7B5BDAD}"/>
+          <p:cNvPr id="5" name="図 4">
+            <a:extLst>
+              <a:ext uri="{FF2B5EF4-FFF2-40B4-BE49-F238E27FC236}">
+                <a16:creationId xmlns:a16="http://schemas.microsoft.com/office/drawing/2014/main" id="{5A03A9FD-4627-4D21-BA50-80D0CA1F6F0C}"/>
               </a:ext>
             </a:extLst>
           </p:cNvPr>
@@ -6765,18 +6538,58 @@
         </p:blipFill>
         <p:spPr>
           <a:xfrm>
-            <a:off x="567542" y="2187126"/>
-            <a:ext cx="2489423" cy="4496314"/>
+            <a:off x="567542" y="1817794"/>
+            <a:ext cx="6014738" cy="4000300"/>
           </a:xfrm>
           <a:prstGeom prst="rect">
             <a:avLst/>
           </a:prstGeom>
         </p:spPr>
       </p:pic>
+      <p:sp>
+        <p:nvSpPr>
+          <p:cNvPr id="7" name="テキスト ボックス 6">
+            <a:extLst>
+              <a:ext uri="{FF2B5EF4-FFF2-40B4-BE49-F238E27FC236}">
+                <a16:creationId xmlns:a16="http://schemas.microsoft.com/office/drawing/2014/main" id="{31CCC1CE-9494-483E-AF30-7A3E3685F824}"/>
+              </a:ext>
+            </a:extLst>
+          </p:cNvPr>
+          <p:cNvSpPr txBox="1"/>
+          <p:nvPr/>
+        </p:nvSpPr>
+        <p:spPr>
+          <a:xfrm>
+            <a:off x="567541" y="5957794"/>
+            <a:ext cx="8186857" cy="461665"/>
+          </a:xfrm>
+          <a:prstGeom prst="rect">
+            <a:avLst/>
+          </a:prstGeom>
+          <a:noFill/>
+        </p:spPr>
+        <p:txBody>
+          <a:bodyPr wrap="none" rtlCol="0">
+            <a:spAutoFit/>
+          </a:bodyPr>
+          <a:lstStyle/>
+          <a:p>
+            <a:r>
+              <a:rPr kumimoji="1" lang="en-US" altLang="ja-JP" sz="2400" dirty="0"/>
+              <a:t>※</a:t>
+            </a:r>
+            <a:r>
+              <a:rPr lang="ja-JP" altLang="en-US" sz="2400" dirty="0"/>
+              <a:t>全て同じ位置に出てるので見た目は変わりません。。。</a:t>
+            </a:r>
+            <a:endParaRPr kumimoji="1" lang="en-US" altLang="ja-JP" sz="2400" dirty="0"/>
+          </a:p>
+        </p:txBody>
+      </p:sp>
     </p:spTree>
     <p:extLst>
       <p:ext uri="{BB962C8B-B14F-4D97-AF65-F5344CB8AC3E}">
-        <p14:creationId xmlns:p14="http://schemas.microsoft.com/office/powerpoint/2010/main" val="2586179459"/>
+        <p14:creationId xmlns:p14="http://schemas.microsoft.com/office/powerpoint/2010/main" val="3141197398"/>
       </p:ext>
     </p:extLst>
   </p:cSld>
@@ -6853,7 +6666,7 @@
         <p:spPr>
           <a:xfrm>
             <a:off x="567542" y="1216429"/>
-            <a:ext cx="7736413" cy="461665"/>
+            <a:ext cx="10434267" cy="830997"/>
           </a:xfrm>
           <a:prstGeom prst="rect">
             <a:avLst/>
@@ -6868,19 +6681,46 @@
           <a:p>
             <a:r>
               <a:rPr kumimoji="1" lang="ja-JP" altLang="en-US" sz="2400" dirty="0"/>
-              <a:t>詳細の「</a:t>
-            </a:r>
-            <a:r>
-              <a:rPr kumimoji="1" lang="en-US" altLang="ja-JP" sz="2400" b="1" dirty="0">
+              <a:t>エフェクトの形状を設定します。</a:t>
+            </a:r>
+            <a:endParaRPr kumimoji="1" lang="en-US" altLang="ja-JP" sz="2400" dirty="0"/>
+          </a:p>
+          <a:p>
+            <a:r>
+              <a:rPr lang="ja-JP" altLang="en-US" sz="2400" dirty="0"/>
+              <a:t>「</a:t>
+            </a:r>
+            <a:r>
+              <a:rPr lang="ja-JP" altLang="en-US" sz="2400" b="1" dirty="0">
                 <a:solidFill>
                   <a:srgbClr val="FF0000"/>
                 </a:solidFill>
               </a:rPr>
-              <a:t>Spawn Count</a:t>
-            </a:r>
-            <a:r>
-              <a:rPr kumimoji="1" lang="ja-JP" altLang="en-US" sz="2400" dirty="0"/>
-              <a:t>」で粒子の数を設定できます。</a:t>
+              <a:t>パーティクルのスポーン</a:t>
+            </a:r>
+            <a:r>
+              <a:rPr lang="ja-JP" altLang="en-US" sz="2400" dirty="0"/>
+              <a:t>」から「</a:t>
+            </a:r>
+            <a:r>
+              <a:rPr lang="en-US" altLang="ja-JP" sz="2400" b="1" dirty="0">
+                <a:solidFill>
+                  <a:srgbClr val="FF0000"/>
+                </a:solidFill>
+              </a:rPr>
+              <a:t>Shape </a:t>
+            </a:r>
+            <a:r>
+              <a:rPr lang="en-US" altLang="ja-JP" sz="2400" b="1" dirty="0" err="1">
+                <a:solidFill>
+                  <a:srgbClr val="FF0000"/>
+                </a:solidFill>
+              </a:rPr>
+              <a:t>Locaton</a:t>
+            </a:r>
+            <a:r>
+              <a:rPr lang="ja-JP" altLang="en-US" sz="2400" dirty="0"/>
+              <a:t>」を追加しましょう。</a:t>
             </a:r>
             <a:endParaRPr kumimoji="1" lang="en-US" altLang="ja-JP" sz="2400" dirty="0"/>
           </a:p>
@@ -6888,10 +6728,10 @@
       </p:sp>
       <p:pic>
         <p:nvPicPr>
-          <p:cNvPr id="5" name="図 4">
-            <a:extLst>
-              <a:ext uri="{FF2B5EF4-FFF2-40B4-BE49-F238E27FC236}">
-                <a16:creationId xmlns:a16="http://schemas.microsoft.com/office/drawing/2014/main" id="{5A03A9FD-4627-4D21-BA50-80D0CA1F6F0C}"/>
+          <p:cNvPr id="3" name="図 2">
+            <a:extLst>
+              <a:ext uri="{FF2B5EF4-FFF2-40B4-BE49-F238E27FC236}">
+                <a16:creationId xmlns:a16="http://schemas.microsoft.com/office/drawing/2014/main" id="{0C241560-587B-429B-BF46-A44F189DAB14}"/>
               </a:ext>
             </a:extLst>
           </p:cNvPr>
@@ -6908,58 +6748,18 @@
         </p:blipFill>
         <p:spPr>
           <a:xfrm>
-            <a:off x="567542" y="1817794"/>
-            <a:ext cx="6014738" cy="4000300"/>
+            <a:off x="567541" y="2187125"/>
+            <a:ext cx="7491739" cy="3454445"/>
           </a:xfrm>
           <a:prstGeom prst="rect">
             <a:avLst/>
           </a:prstGeom>
         </p:spPr>
       </p:pic>
-      <p:sp>
-        <p:nvSpPr>
-          <p:cNvPr id="7" name="テキスト ボックス 6">
-            <a:extLst>
-              <a:ext uri="{FF2B5EF4-FFF2-40B4-BE49-F238E27FC236}">
-                <a16:creationId xmlns:a16="http://schemas.microsoft.com/office/drawing/2014/main" id="{31CCC1CE-9494-483E-AF30-7A3E3685F824}"/>
-              </a:ext>
-            </a:extLst>
-          </p:cNvPr>
-          <p:cNvSpPr txBox="1"/>
-          <p:nvPr/>
-        </p:nvSpPr>
-        <p:spPr>
-          <a:xfrm>
-            <a:off x="567541" y="5957794"/>
-            <a:ext cx="8186857" cy="461665"/>
-          </a:xfrm>
-          <a:prstGeom prst="rect">
-            <a:avLst/>
-          </a:prstGeom>
-          <a:noFill/>
-        </p:spPr>
-        <p:txBody>
-          <a:bodyPr wrap="none" rtlCol="0">
-            <a:spAutoFit/>
-          </a:bodyPr>
-          <a:lstStyle/>
-          <a:p>
-            <a:r>
-              <a:rPr kumimoji="1" lang="en-US" altLang="ja-JP" sz="2400" dirty="0"/>
-              <a:t>※</a:t>
-            </a:r>
-            <a:r>
-              <a:rPr lang="ja-JP" altLang="en-US" sz="2400" dirty="0"/>
-              <a:t>全て同じ位置に出てるので見た目は変わりません。。。</a:t>
-            </a:r>
-            <a:endParaRPr kumimoji="1" lang="en-US" altLang="ja-JP" sz="2400" dirty="0"/>
-          </a:p>
-        </p:txBody>
-      </p:sp>
     </p:spTree>
     <p:extLst>
       <p:ext uri="{BB962C8B-B14F-4D97-AF65-F5344CB8AC3E}">
-        <p14:creationId xmlns:p14="http://schemas.microsoft.com/office/powerpoint/2010/main" val="3141197398"/>
+        <p14:creationId xmlns:p14="http://schemas.microsoft.com/office/powerpoint/2010/main" val="1606195922"/>
       </p:ext>
     </p:extLst>
   </p:cSld>
@@ -7036,7 +6836,7 @@
         <p:spPr>
           <a:xfrm>
             <a:off x="567542" y="1216429"/>
-            <a:ext cx="10434267" cy="830997"/>
+            <a:ext cx="8404865" cy="830997"/>
           </a:xfrm>
           <a:prstGeom prst="rect">
             <a:avLst/>
@@ -7051,46 +6851,26 @@
           <a:p>
             <a:r>
               <a:rPr kumimoji="1" lang="ja-JP" altLang="en-US" sz="2400" dirty="0"/>
-              <a:t>エフェクトの形状を設定します。</a:t>
-            </a:r>
-            <a:endParaRPr kumimoji="1" lang="en-US" altLang="ja-JP" sz="2400" dirty="0"/>
-          </a:p>
-          <a:p>
-            <a:r>
-              <a:rPr lang="ja-JP" altLang="en-US" sz="2400" dirty="0"/>
               <a:t>「</a:t>
             </a:r>
             <a:r>
-              <a:rPr lang="ja-JP" altLang="en-US" sz="2400" b="1" dirty="0">
+              <a:rPr kumimoji="1" lang="en-US" altLang="ja-JP" sz="2400" b="1" dirty="0">
                 <a:solidFill>
                   <a:srgbClr val="FF0000"/>
                 </a:solidFill>
               </a:rPr>
-              <a:t>パーティクルのスポーン</a:t>
-            </a:r>
+              <a:t>Shape Primitive</a:t>
+            </a:r>
+            <a:r>
+              <a:rPr kumimoji="1" lang="ja-JP" altLang="en-US" sz="2400" dirty="0"/>
+              <a:t>」から発生位置の形状を選択できます。</a:t>
+            </a:r>
+            <a:endParaRPr kumimoji="1" lang="en-US" altLang="ja-JP" sz="2400" dirty="0"/>
+          </a:p>
+          <a:p>
             <a:r>
               <a:rPr lang="ja-JP" altLang="en-US" sz="2400" dirty="0"/>
-              <a:t>」から「</a:t>
-            </a:r>
-            <a:r>
-              <a:rPr lang="en-US" altLang="ja-JP" sz="2400" b="1" dirty="0">
-                <a:solidFill>
-                  <a:srgbClr val="FF0000"/>
-                </a:solidFill>
-              </a:rPr>
-              <a:t>Shape </a:t>
-            </a:r>
-            <a:r>
-              <a:rPr lang="en-US" altLang="ja-JP" sz="2400" b="1" dirty="0" err="1">
-                <a:solidFill>
-                  <a:srgbClr val="FF0000"/>
-                </a:solidFill>
-              </a:rPr>
-              <a:t>Locaton</a:t>
-            </a:r>
-            <a:r>
-              <a:rPr lang="ja-JP" altLang="en-US" sz="2400" dirty="0"/>
-              <a:t>」を追加しましょう。</a:t>
+              <a:t>色々切り替えて確認してみましょう。</a:t>
             </a:r>
             <a:endParaRPr kumimoji="1" lang="en-US" altLang="ja-JP" sz="2400" dirty="0"/>
           </a:p>
@@ -7098,10 +6878,10 @@
       </p:sp>
       <p:pic>
         <p:nvPicPr>
-          <p:cNvPr id="3" name="図 2">
-            <a:extLst>
-              <a:ext uri="{FF2B5EF4-FFF2-40B4-BE49-F238E27FC236}">
-                <a16:creationId xmlns:a16="http://schemas.microsoft.com/office/drawing/2014/main" id="{0C241560-587B-429B-BF46-A44F189DAB14}"/>
+          <p:cNvPr id="5" name="図 4">
+            <a:extLst>
+              <a:ext uri="{FF2B5EF4-FFF2-40B4-BE49-F238E27FC236}">
+                <a16:creationId xmlns:a16="http://schemas.microsoft.com/office/drawing/2014/main" id="{9FCA370F-832C-467A-BB37-06698A07C38B}"/>
               </a:ext>
             </a:extLst>
           </p:cNvPr>
@@ -7118,18 +6898,72 @@
         </p:blipFill>
         <p:spPr>
           <a:xfrm>
-            <a:off x="567541" y="2187125"/>
-            <a:ext cx="7491739" cy="3454445"/>
+            <a:off x="567542" y="2187126"/>
+            <a:ext cx="6056196" cy="3792333"/>
           </a:xfrm>
           <a:prstGeom prst="rect">
             <a:avLst/>
           </a:prstGeom>
         </p:spPr>
       </p:pic>
+      <p:sp>
+        <p:nvSpPr>
+          <p:cNvPr id="7" name="矢印: 右 6">
+            <a:extLst>
+              <a:ext uri="{FF2B5EF4-FFF2-40B4-BE49-F238E27FC236}">
+                <a16:creationId xmlns:a16="http://schemas.microsoft.com/office/drawing/2014/main" id="{276F7436-8293-46BC-91CA-A56351A0E615}"/>
+              </a:ext>
+            </a:extLst>
+          </p:cNvPr>
+          <p:cNvSpPr/>
+          <p:nvPr/>
+        </p:nvSpPr>
+        <p:spPr>
+          <a:xfrm rot="13377481">
+            <a:off x="3032381" y="5316071"/>
+            <a:ext cx="519953" cy="331694"/>
+          </a:xfrm>
+          <a:prstGeom prst="rightArrow">
+            <a:avLst/>
+          </a:prstGeom>
+          <a:solidFill>
+            <a:srgbClr val="FF0000"/>
+          </a:solidFill>
+          <a:ln>
+            <a:solidFill>
+              <a:schemeClr val="tx1"/>
+            </a:solidFill>
+          </a:ln>
+        </p:spPr>
+        <p:style>
+          <a:lnRef idx="2">
+            <a:schemeClr val="accent1">
+              <a:shade val="50000"/>
+            </a:schemeClr>
+          </a:lnRef>
+          <a:fillRef idx="1">
+            <a:schemeClr val="accent1"/>
+          </a:fillRef>
+          <a:effectRef idx="0">
+            <a:schemeClr val="accent1"/>
+          </a:effectRef>
+          <a:fontRef idx="minor">
+            <a:schemeClr val="lt1"/>
+          </a:fontRef>
+        </p:style>
+        <p:txBody>
+          <a:bodyPr rtlCol="0" anchor="ctr"/>
+          <a:lstStyle/>
+          <a:p>
+            <a:pPr algn="ctr"/>
+            <a:endParaRPr kumimoji="1" lang="ja-JP" altLang="en-US"/>
+          </a:p>
+        </p:txBody>
+      </p:sp>
     </p:spTree>
     <p:extLst>
       <p:ext uri="{BB962C8B-B14F-4D97-AF65-F5344CB8AC3E}">
-        <p14:creationId xmlns:p14="http://schemas.microsoft.com/office/powerpoint/2010/main" val="1606195922"/>
+        <p14:creationId xmlns:p14="http://schemas.microsoft.com/office/powerpoint/2010/main" val="4098460505"/>
       </p:ext>
     </p:extLst>
   </p:cSld>
